--- a/Proyecto/Presentacion.pptx
+++ b/Proyecto/Presentacion.pptx
@@ -250,7 +250,7 @@
           <a:p>
             <a:fld id="{88369B9F-131C-2846-AB8F-CEE154B4CAEB}" type="datetimeFigureOut">
               <a:rPr lang="es-CO" smtClean="0"/>
-              <a:t>29/10/2024</a:t>
+              <a:t>14/11/2024</a:t>
             </a:fld>
             <a:endParaRPr lang="es-CO"/>
           </a:p>
@@ -427,7 +427,7 @@
           <a:p>
             <a:fld id="{9660CB96-A603-FF42-AE46-F5F75F80A67B}" type="datetimeFigureOut">
               <a:rPr lang="es-CO" smtClean="0"/>
-              <a:t>29/10/2024</a:t>
+              <a:t>14/11/2024</a:t>
             </a:fld>
             <a:endParaRPr lang="es-CO"/>
           </a:p>
@@ -844,7 +844,7 @@
           <a:p>
             <a:fld id="{BD986248-06F7-A441-A47A-264EBD310E11}" type="datetimeFigureOut">
               <a:rPr lang="es-CO" smtClean="0"/>
-              <a:t>29/10/2024</a:t>
+              <a:t>14/11/2024</a:t>
             </a:fld>
             <a:endParaRPr lang="es-CO"/>
           </a:p>
@@ -1044,7 +1044,7 @@
           <a:p>
             <a:fld id="{BD986248-06F7-A441-A47A-264EBD310E11}" type="datetimeFigureOut">
               <a:rPr lang="es-CO" smtClean="0"/>
-              <a:t>29/10/2024</a:t>
+              <a:t>14/11/2024</a:t>
             </a:fld>
             <a:endParaRPr lang="es-CO"/>
           </a:p>
@@ -1254,7 +1254,7 @@
           <a:p>
             <a:fld id="{BD986248-06F7-A441-A47A-264EBD310E11}" type="datetimeFigureOut">
               <a:rPr lang="es-CO" smtClean="0"/>
-              <a:t>29/10/2024</a:t>
+              <a:t>14/11/2024</a:t>
             </a:fld>
             <a:endParaRPr lang="es-CO"/>
           </a:p>
@@ -1415,7 +1415,7 @@
           <a:p>
             <a:fld id="{BD986248-06F7-A441-A47A-264EBD310E11}" type="datetimeFigureOut">
               <a:rPr lang="es-CO" smtClean="0"/>
-              <a:t>29/10/2024</a:t>
+              <a:t>14/11/2024</a:t>
             </a:fld>
             <a:endParaRPr lang="es-CO"/>
           </a:p>
@@ -1615,7 +1615,7 @@
           <a:p>
             <a:fld id="{BD986248-06F7-A441-A47A-264EBD310E11}" type="datetimeFigureOut">
               <a:rPr lang="es-CO" smtClean="0"/>
-              <a:t>29/10/2024</a:t>
+              <a:t>14/11/2024</a:t>
             </a:fld>
             <a:endParaRPr lang="es-CO"/>
           </a:p>
@@ -1891,7 +1891,7 @@
           <a:p>
             <a:fld id="{BD986248-06F7-A441-A47A-264EBD310E11}" type="datetimeFigureOut">
               <a:rPr lang="es-CO" smtClean="0"/>
-              <a:t>29/10/2024</a:t>
+              <a:t>14/11/2024</a:t>
             </a:fld>
             <a:endParaRPr lang="es-CO"/>
           </a:p>
@@ -2159,7 +2159,7 @@
           <a:p>
             <a:fld id="{BD986248-06F7-A441-A47A-264EBD310E11}" type="datetimeFigureOut">
               <a:rPr lang="es-CO" smtClean="0"/>
-              <a:t>29/10/2024</a:t>
+              <a:t>14/11/2024</a:t>
             </a:fld>
             <a:endParaRPr lang="es-CO"/>
           </a:p>
@@ -2574,7 +2574,7 @@
           <a:p>
             <a:fld id="{BD986248-06F7-A441-A47A-264EBD310E11}" type="datetimeFigureOut">
               <a:rPr lang="es-CO" smtClean="0"/>
-              <a:t>29/10/2024</a:t>
+              <a:t>14/11/2024</a:t>
             </a:fld>
             <a:endParaRPr lang="es-CO"/>
           </a:p>
@@ -2716,7 +2716,7 @@
           <a:p>
             <a:fld id="{BD986248-06F7-A441-A47A-264EBD310E11}" type="datetimeFigureOut">
               <a:rPr lang="es-CO" smtClean="0"/>
-              <a:t>29/10/2024</a:t>
+              <a:t>14/11/2024</a:t>
             </a:fld>
             <a:endParaRPr lang="es-CO"/>
           </a:p>
@@ -2829,7 +2829,7 @@
           <a:p>
             <a:fld id="{BD986248-06F7-A441-A47A-264EBD310E11}" type="datetimeFigureOut">
               <a:rPr lang="es-CO" smtClean="0"/>
-              <a:t>29/10/2024</a:t>
+              <a:t>14/11/2024</a:t>
             </a:fld>
             <a:endParaRPr lang="es-CO"/>
           </a:p>
@@ -3158,7 +3158,7 @@
           <a:p>
             <a:fld id="{BD986248-06F7-A441-A47A-264EBD310E11}" type="datetimeFigureOut">
               <a:rPr lang="es-CO" smtClean="0"/>
-              <a:t>29/10/2024</a:t>
+              <a:t>14/11/2024</a:t>
             </a:fld>
             <a:endParaRPr lang="es-CO"/>
           </a:p>
@@ -3447,7 +3447,7 @@
           <a:p>
             <a:fld id="{BD986248-06F7-A441-A47A-264EBD310E11}" type="datetimeFigureOut">
               <a:rPr lang="es-CO" smtClean="0"/>
-              <a:t>29/10/2024</a:t>
+              <a:t>14/11/2024</a:t>
             </a:fld>
             <a:endParaRPr lang="es-CO"/>
           </a:p>
@@ -3690,7 +3690,7 @@
           <a:p>
             <a:fld id="{BD986248-06F7-A441-A47A-264EBD310E11}" type="datetimeFigureOut">
               <a:rPr lang="es-CO" smtClean="0"/>
-              <a:t>29/10/2024</a:t>
+              <a:t>14/11/2024</a:t>
             </a:fld>
             <a:endParaRPr lang="es-CO"/>
           </a:p>
@@ -4174,7 +4174,19 @@
                 </a:solidFill>
                 <a:latin typeface="Work Sans Bold Roman" pitchFamily="2" charset="77"/>
               </a:rPr>
-              <a:t>Software administrador y pagina web GigaGains</a:t>
+              <a:t>Software administrador </a:t>
+            </a:r>
+            <a:r>
+              <a:rPr lang="es-ES" sz="4000" b="1" dirty="0" err="1">
+                <a:solidFill>
+                  <a:prstClr val="black">
+                    <a:lumMod val="75000"/>
+                    <a:lumOff val="25000"/>
+                  </a:prstClr>
+                </a:solidFill>
+                <a:latin typeface="Work Sans Bold Roman" pitchFamily="2" charset="77"/>
+              </a:rPr>
+              <a:t>GigaGains</a:t>
             </a:r>
             <a:endParaRPr kumimoji="0" lang="es-ES" sz="4000" b="1" i="0" u="none" strike="noStrike" kern="1200" cap="none" spc="0" normalizeH="0" baseline="0" noProof="0" dirty="0">
               <a:ln>
@@ -5359,7 +5371,7 @@
             </a:pPr>
             <a:r>
               <a:rPr lang="es-ES" sz="2000" dirty="0"/>
-              <a:t>Deben minimizarse los clics necesarios para realizar operaciones comunes (crear, editar, eliminar).</a:t>
+              <a:t>Los campos solo deben recibir datos del tipo permitido (números y/o letras).</a:t>
             </a:r>
           </a:p>
           <a:p>
@@ -5397,7 +5409,7 @@
               <a:rPr lang="es-ES" sz="2000" dirty="0">
                 <a:latin typeface="Work Sans Light Roman" pitchFamily="2" charset="77"/>
               </a:rPr>
-              <a:t>Capacitación necesaria para la buena usabilidad del software</a:t>
+              <a:t>Capacitación necesaria para la buena usabilidad del software.</a:t>
             </a:r>
           </a:p>
           <a:p>
@@ -5405,7 +5417,7 @@
               <a:buFont typeface="Arial" panose="020B0604020202020204" pitchFamily="34" charset="0"/>
               <a:buChar char="•"/>
             </a:pPr>
-            <a:endParaRPr lang="es-ES" sz="2000">
+            <a:endParaRPr lang="es-ES" sz="2000" dirty="0">
               <a:latin typeface="Work Sans Light Roman" pitchFamily="2" charset="77"/>
             </a:endParaRPr>
           </a:p>
@@ -5685,10 +5697,10 @@
       </p:sp>
       <p:pic>
         <p:nvPicPr>
-          <p:cNvPr id="3" name="Imagen 2">
-            <a:extLst>
-              <a:ext uri="{FF2B5EF4-FFF2-40B4-BE49-F238E27FC236}">
-                <a16:creationId xmlns:a16="http://schemas.microsoft.com/office/drawing/2014/main" id="{D763DFEC-2173-4DA3-8687-C67CF8C451E1}"/>
+          <p:cNvPr id="4" name="Imagen 3">
+            <a:extLst>
+              <a:ext uri="{FF2B5EF4-FFF2-40B4-BE49-F238E27FC236}">
+                <a16:creationId xmlns:a16="http://schemas.microsoft.com/office/drawing/2014/main" id="{FF9DDEE4-6EBD-41A3-B90F-6F95C10C4FA6}"/>
               </a:ext>
             </a:extLst>
           </p:cNvPr>
@@ -5705,8 +5717,8 @@
         </p:blipFill>
         <p:spPr>
           <a:xfrm>
-            <a:off x="1775406" y="1381480"/>
-            <a:ext cx="8641187" cy="5059831"/>
+            <a:off x="541866" y="1225984"/>
+            <a:ext cx="11108267" cy="5279671"/>
           </a:xfrm>
           <a:prstGeom prst="rect">
             <a:avLst/>
@@ -5927,7 +5939,7 @@
         </p:nvSpPr>
         <p:spPr>
           <a:xfrm>
-            <a:off x="456236" y="416689"/>
+            <a:off x="447769" y="247349"/>
             <a:ext cx="9815809" cy="741563"/>
           </a:xfrm>
           <a:prstGeom prst="rect">
@@ -6000,8 +6012,8 @@
         </p:nvSpPr>
         <p:spPr>
           <a:xfrm>
-            <a:off x="456236" y="1158252"/>
-            <a:ext cx="11279528" cy="2862322"/>
+            <a:off x="447769" y="988912"/>
+            <a:ext cx="11279528" cy="6217087"/>
           </a:xfrm>
           <a:prstGeom prst="rect">
             <a:avLst/>
@@ -6014,88 +6026,164 @@
           </a:bodyPr>
           <a:lstStyle/>
           <a:p>
-            <a:pPr marL="285750" indent="-285750">
-              <a:buFont typeface="Arial" panose="020B0604020202020204" pitchFamily="34" charset="0"/>
-              <a:buChar char="•"/>
-            </a:pPr>
-            <a:r>
-              <a:rPr lang="es-ES" sz="2000" dirty="0">
+            <a:r>
+              <a:rPr lang="es-ES" i="1" dirty="0"/>
+              <a:t>ChatGPT</a:t>
+            </a:r>
+            <a:r>
+              <a:rPr lang="es-ES" dirty="0"/>
+              <a:t>. (s/f). Chatgpt.com. Recuperado el 14 de noviembre de 2024, de </a:t>
+            </a:r>
+            <a:r>
+              <a:rPr lang="es-ES" dirty="0">
                 <a:hlinkClick r:id="rId2"/>
               </a:rPr>
-              <a:t>https://www.fdi.ucm.es/profesor/jpavon/poo/tema6resumido.pdf</a:t>
-            </a:r>
-            <a:endParaRPr lang="es-ES" sz="2000" dirty="0">
-              <a:latin typeface="Work Sans Light Roman" pitchFamily="2" charset="77"/>
-            </a:endParaRPr>
-          </a:p>
-          <a:p>
-            <a:pPr marL="285750" indent="-285750">
-              <a:buFont typeface="Arial" panose="020B0604020202020204" pitchFamily="34" charset="0"/>
-              <a:buChar char="•"/>
-            </a:pPr>
-            <a:endParaRPr lang="es-ES" sz="2000" dirty="0">
-              <a:latin typeface="Work Sans Light Roman" pitchFamily="2" charset="77"/>
-            </a:endParaRPr>
-          </a:p>
-          <a:p>
-            <a:pPr marL="285750" indent="-285750">
-              <a:buFont typeface="Arial" panose="020B0604020202020204" pitchFamily="34" charset="0"/>
-              <a:buChar char="•"/>
-            </a:pPr>
-            <a:r>
-              <a:rPr lang="es-ES" sz="2000" dirty="0">
+              <a:t>https://chatgpt.com/</a:t>
+            </a:r>
+            <a:endParaRPr lang="es-ES" dirty="0"/>
+          </a:p>
+          <a:p>
+            <a:endParaRPr lang="es-ES" dirty="0"/>
+          </a:p>
+          <a:p>
+            <a:r>
+              <a:rPr lang="es-ES" dirty="0"/>
+              <a:t>Durán, M. (2022, diciembre 5). </a:t>
+            </a:r>
+            <a:r>
+              <a:rPr lang="es-ES" i="1" dirty="0"/>
+              <a:t>Qué es un objeto en Java, cuáles son sus elementos y cómo crearlo</a:t>
+            </a:r>
+            <a:r>
+              <a:rPr lang="es-ES" dirty="0"/>
+              <a:t>. Hubspot.es. </a:t>
+            </a:r>
+            <a:r>
+              <a:rPr lang="es-ES" dirty="0">
                 <a:hlinkClick r:id="rId3"/>
               </a:rPr>
-              <a:t>https://uneweb.edu.ve/tuto-docs/guia-mysql-1.pdf</a:t>
-            </a:r>
-            <a:endParaRPr lang="es-ES" sz="2000" dirty="0"/>
-          </a:p>
-          <a:p>
-            <a:pPr marL="285750" indent="-285750">
-              <a:buFont typeface="Arial" panose="020B0604020202020204" pitchFamily="34" charset="0"/>
-              <a:buChar char="•"/>
-            </a:pPr>
-            <a:endParaRPr lang="es-ES" sz="2000" dirty="0"/>
-          </a:p>
-          <a:p>
-            <a:pPr marL="285750" indent="-285750">
-              <a:buFont typeface="Arial" panose="020B0604020202020204" pitchFamily="34" charset="0"/>
-              <a:buChar char="•"/>
-            </a:pPr>
-            <a:r>
-              <a:rPr lang="es-ES" sz="2000" dirty="0">
+              <a:t>https://blog.hubspot.es/website/que-es-objeto-java</a:t>
+            </a:r>
+            <a:endParaRPr lang="es-ES" dirty="0"/>
+          </a:p>
+          <a:p>
+            <a:endParaRPr lang="es-ES" dirty="0"/>
+          </a:p>
+          <a:p>
+            <a:r>
+              <a:rPr lang="es-ES" i="1" dirty="0"/>
+              <a:t>Guía de MySQL</a:t>
+            </a:r>
+            <a:r>
+              <a:rPr lang="es-ES" dirty="0"/>
+              <a:t>. (s/f). Edu.ve. Recuperado el 14 de noviembre de 2024, de </a:t>
+            </a:r>
+            <a:r>
+              <a:rPr lang="es-ES" dirty="0">
                 <a:hlinkClick r:id="rId4"/>
               </a:rPr>
-              <a:t>https://blog.hubspot.es/website/que-es-objeto-java</a:t>
-            </a:r>
-            <a:endParaRPr lang="es-ES" sz="2000" dirty="0"/>
-          </a:p>
-          <a:p>
-            <a:pPr marL="285750" indent="-285750">
-              <a:buFont typeface="Arial" panose="020B0604020202020204" pitchFamily="34" charset="0"/>
-              <a:buChar char="•"/>
-            </a:pPr>
-            <a:endParaRPr lang="es-ES" sz="2000" dirty="0"/>
-          </a:p>
-          <a:p>
-            <a:pPr marL="285750" indent="-285750">
-              <a:buFont typeface="Arial" panose="020B0604020202020204" pitchFamily="34" charset="0"/>
-              <a:buChar char="•"/>
-            </a:pPr>
-            <a:r>
-              <a:rPr lang="es-ES" sz="2000" dirty="0">
+              <a:t>https://uneweb.edu.ve/tuto-docs/guia-mysql-1.pdf</a:t>
+            </a:r>
+            <a:endParaRPr lang="es-ES" dirty="0"/>
+          </a:p>
+          <a:p>
+            <a:endParaRPr lang="es-ES" dirty="0"/>
+          </a:p>
+          <a:p>
+            <a:r>
+              <a:rPr lang="es-ES" i="1" dirty="0" err="1"/>
+              <a:t>How</a:t>
+            </a:r>
+            <a:r>
+              <a:rPr lang="es-ES" i="1" dirty="0"/>
+              <a:t> </a:t>
+            </a:r>
+            <a:r>
+              <a:rPr lang="es-ES" i="1" dirty="0" err="1"/>
+              <a:t>to</a:t>
+            </a:r>
+            <a:r>
+              <a:rPr lang="es-ES" i="1" dirty="0"/>
+              <a:t> use combo boxes</a:t>
+            </a:r>
+            <a:r>
+              <a:rPr lang="es-ES" dirty="0"/>
+              <a:t>. (s/f). Oracle.com. Recuperado el 14 de noviembre de 2024, de </a:t>
+            </a:r>
+            <a:r>
+              <a:rPr lang="es-ES" dirty="0">
                 <a:hlinkClick r:id="rId5"/>
               </a:rPr>
-              <a:t>https://chatgpt.com</a:t>
-            </a:r>
-            <a:endParaRPr lang="es-ES" sz="2000" dirty="0"/>
-          </a:p>
-          <a:p>
-            <a:pPr marL="285750" indent="-285750">
-              <a:buFont typeface="Arial" panose="020B0604020202020204" pitchFamily="34" charset="0"/>
-              <a:buChar char="•"/>
-            </a:pPr>
-            <a:endParaRPr lang="es-ES" sz="2000" dirty="0"/>
+              <a:t>https://docs.oracle.com/javase/tutorial/uiswing/components/combobox.html</a:t>
+            </a:r>
+            <a:endParaRPr lang="es-ES" dirty="0"/>
+          </a:p>
+          <a:p>
+            <a:endParaRPr lang="es-ES" dirty="0"/>
+          </a:p>
+          <a:p>
+            <a:r>
+              <a:rPr lang="es-ES" i="1" dirty="0"/>
+              <a:t>P.O.O — Tema 6 — Interfaces gráficas de usuario Carlos Cervigón</a:t>
+            </a:r>
+            <a:r>
+              <a:rPr lang="es-ES" dirty="0"/>
+              <a:t>. (s/f). Ucm.es. Recuperado el 14 de noviembre de 2024, de </a:t>
+            </a:r>
+            <a:r>
+              <a:rPr lang="es-ES" dirty="0">
+                <a:hlinkClick r:id="rId6"/>
+              </a:rPr>
+              <a:t>https://www.fdi.ucm.es/profesor/jpavon/poo/tema6resumido.pdf</a:t>
+            </a:r>
+            <a:endParaRPr lang="es-ES" dirty="0"/>
+          </a:p>
+          <a:p>
+            <a:endParaRPr lang="es-ES" dirty="0"/>
+          </a:p>
+          <a:p>
+            <a:r>
+              <a:rPr lang="es-ES" dirty="0"/>
+              <a:t>Rincón, J. G. (s/f). </a:t>
+            </a:r>
+            <a:r>
+              <a:rPr lang="es-ES" i="1" dirty="0"/>
+              <a:t>Jairo García Rincón</a:t>
+            </a:r>
+            <a:r>
+              <a:rPr lang="es-ES" dirty="0"/>
+              <a:t>. Jairogarciarincon.com. Recuperado el 14 de noviembre de 2024, de </a:t>
+            </a:r>
+            <a:r>
+              <a:rPr lang="es-ES" dirty="0">
+                <a:hlinkClick r:id="rId7"/>
+              </a:rPr>
+              <a:t>https://www.jairogarciarincon.com/clase/interfaces-de-usuario-con-java-swing/componentes-jframe-jlabel-y-jdialog-dialogos-modales</a:t>
+            </a:r>
+            <a:endParaRPr lang="es-ES" dirty="0"/>
+          </a:p>
+          <a:p>
+            <a:endParaRPr lang="es-ES" dirty="0"/>
+          </a:p>
+          <a:p>
+            <a:r>
+              <a:rPr lang="es-ES" i="1" dirty="0"/>
+              <a:t>Swing - JFrame</a:t>
+            </a:r>
+            <a:r>
+              <a:rPr lang="es-ES" dirty="0"/>
+              <a:t>. (s/f). Tutorialesprogramacionya.com. Recuperado el 14 de noviembre de 2024, de </a:t>
+            </a:r>
+            <a:r>
+              <a:rPr lang="es-ES" dirty="0">
+                <a:hlinkClick r:id="rId8"/>
+              </a:rPr>
+              <a:t>https://www.tutorialesprogramacionya.com/javaya/detalleconcepto.php?codigo=104&amp;punto=&amp;inicio=20</a:t>
+            </a:r>
+            <a:endParaRPr lang="es-ES" dirty="0"/>
+          </a:p>
+          <a:p>
+            <a:endParaRPr lang="es-ES" dirty="0"/>
           </a:p>
           <a:p>
             <a:pPr marL="285750" indent="-285750">

--- a/Proyecto/Presentacion.pptx
+++ b/Proyecto/Presentacion.pptx
@@ -5,32 +5,29 @@
     <p:sldMasterId id="2147483648" r:id="rId1"/>
   </p:sldMasterIdLst>
   <p:notesMasterIdLst>
-    <p:notesMasterId r:id="rId22"/>
+    <p:notesMasterId r:id="rId19"/>
   </p:notesMasterIdLst>
   <p:handoutMasterIdLst>
-    <p:handoutMasterId r:id="rId23"/>
+    <p:handoutMasterId r:id="rId20"/>
   </p:handoutMasterIdLst>
   <p:sldIdLst>
     <p:sldId id="538" r:id="rId2"/>
     <p:sldId id="552" r:id="rId3"/>
     <p:sldId id="554" r:id="rId4"/>
     <p:sldId id="556" r:id="rId5"/>
-    <p:sldId id="558" r:id="rId6"/>
-    <p:sldId id="562" r:id="rId7"/>
-    <p:sldId id="535" r:id="rId8"/>
-    <p:sldId id="536" r:id="rId9"/>
-    <p:sldId id="566" r:id="rId10"/>
-    <p:sldId id="567" r:id="rId11"/>
-    <p:sldId id="568" r:id="rId12"/>
-    <p:sldId id="569" r:id="rId13"/>
-    <p:sldId id="570" r:id="rId14"/>
-    <p:sldId id="546" r:id="rId15"/>
-    <p:sldId id="571" r:id="rId16"/>
-    <p:sldId id="550" r:id="rId17"/>
-    <p:sldId id="551" r:id="rId18"/>
-    <p:sldId id="541" r:id="rId19"/>
-    <p:sldId id="572" r:id="rId20"/>
-    <p:sldId id="531" r:id="rId21"/>
+    <p:sldId id="573" r:id="rId6"/>
+    <p:sldId id="574" r:id="rId7"/>
+    <p:sldId id="558" r:id="rId8"/>
+    <p:sldId id="562" r:id="rId9"/>
+    <p:sldId id="535" r:id="rId10"/>
+    <p:sldId id="575" r:id="rId11"/>
+    <p:sldId id="546" r:id="rId12"/>
+    <p:sldId id="571" r:id="rId13"/>
+    <p:sldId id="550" r:id="rId14"/>
+    <p:sldId id="551" r:id="rId15"/>
+    <p:sldId id="541" r:id="rId16"/>
+    <p:sldId id="572" r:id="rId17"/>
+    <p:sldId id="531" r:id="rId18"/>
   </p:sldIdLst>
   <p:sldSz cx="12192000" cy="6858000"/>
   <p:notesSz cx="6858000" cy="9144000"/>
@@ -250,7 +247,7 @@
           <a:p>
             <a:fld id="{88369B9F-131C-2846-AB8F-CEE154B4CAEB}" type="datetimeFigureOut">
               <a:rPr lang="es-CO" smtClean="0"/>
-              <a:t>14/11/2024</a:t>
+              <a:t>22/11/2024</a:t>
             </a:fld>
             <a:endParaRPr lang="es-CO"/>
           </a:p>
@@ -427,7 +424,7 @@
           <a:p>
             <a:fld id="{9660CB96-A603-FF42-AE46-F5F75F80A67B}" type="datetimeFigureOut">
               <a:rPr lang="es-CO" smtClean="0"/>
-              <a:t>14/11/2024</a:t>
+              <a:t>22/11/2024</a:t>
             </a:fld>
             <a:endParaRPr lang="es-CO"/>
           </a:p>
@@ -844,7 +841,7 @@
           <a:p>
             <a:fld id="{BD986248-06F7-A441-A47A-264EBD310E11}" type="datetimeFigureOut">
               <a:rPr lang="es-CO" smtClean="0"/>
-              <a:t>14/11/2024</a:t>
+              <a:t>22/11/2024</a:t>
             </a:fld>
             <a:endParaRPr lang="es-CO"/>
           </a:p>
@@ -1044,7 +1041,7 @@
           <a:p>
             <a:fld id="{BD986248-06F7-A441-A47A-264EBD310E11}" type="datetimeFigureOut">
               <a:rPr lang="es-CO" smtClean="0"/>
-              <a:t>14/11/2024</a:t>
+              <a:t>22/11/2024</a:t>
             </a:fld>
             <a:endParaRPr lang="es-CO"/>
           </a:p>
@@ -1254,7 +1251,7 @@
           <a:p>
             <a:fld id="{BD986248-06F7-A441-A47A-264EBD310E11}" type="datetimeFigureOut">
               <a:rPr lang="es-CO" smtClean="0"/>
-              <a:t>14/11/2024</a:t>
+              <a:t>22/11/2024</a:t>
             </a:fld>
             <a:endParaRPr lang="es-CO"/>
           </a:p>
@@ -1415,7 +1412,7 @@
           <a:p>
             <a:fld id="{BD986248-06F7-A441-A47A-264EBD310E11}" type="datetimeFigureOut">
               <a:rPr lang="es-CO" smtClean="0"/>
-              <a:t>14/11/2024</a:t>
+              <a:t>22/11/2024</a:t>
             </a:fld>
             <a:endParaRPr lang="es-CO"/>
           </a:p>
@@ -1615,7 +1612,7 @@
           <a:p>
             <a:fld id="{BD986248-06F7-A441-A47A-264EBD310E11}" type="datetimeFigureOut">
               <a:rPr lang="es-CO" smtClean="0"/>
-              <a:t>14/11/2024</a:t>
+              <a:t>22/11/2024</a:t>
             </a:fld>
             <a:endParaRPr lang="es-CO"/>
           </a:p>
@@ -1891,7 +1888,7 @@
           <a:p>
             <a:fld id="{BD986248-06F7-A441-A47A-264EBD310E11}" type="datetimeFigureOut">
               <a:rPr lang="es-CO" smtClean="0"/>
-              <a:t>14/11/2024</a:t>
+              <a:t>22/11/2024</a:t>
             </a:fld>
             <a:endParaRPr lang="es-CO"/>
           </a:p>
@@ -2159,7 +2156,7 @@
           <a:p>
             <a:fld id="{BD986248-06F7-A441-A47A-264EBD310E11}" type="datetimeFigureOut">
               <a:rPr lang="es-CO" smtClean="0"/>
-              <a:t>14/11/2024</a:t>
+              <a:t>22/11/2024</a:t>
             </a:fld>
             <a:endParaRPr lang="es-CO"/>
           </a:p>
@@ -2574,7 +2571,7 @@
           <a:p>
             <a:fld id="{BD986248-06F7-A441-A47A-264EBD310E11}" type="datetimeFigureOut">
               <a:rPr lang="es-CO" smtClean="0"/>
-              <a:t>14/11/2024</a:t>
+              <a:t>22/11/2024</a:t>
             </a:fld>
             <a:endParaRPr lang="es-CO"/>
           </a:p>
@@ -2716,7 +2713,7 @@
           <a:p>
             <a:fld id="{BD986248-06F7-A441-A47A-264EBD310E11}" type="datetimeFigureOut">
               <a:rPr lang="es-CO" smtClean="0"/>
-              <a:t>14/11/2024</a:t>
+              <a:t>22/11/2024</a:t>
             </a:fld>
             <a:endParaRPr lang="es-CO"/>
           </a:p>
@@ -2829,7 +2826,7 @@
           <a:p>
             <a:fld id="{BD986248-06F7-A441-A47A-264EBD310E11}" type="datetimeFigureOut">
               <a:rPr lang="es-CO" smtClean="0"/>
-              <a:t>14/11/2024</a:t>
+              <a:t>22/11/2024</a:t>
             </a:fld>
             <a:endParaRPr lang="es-CO"/>
           </a:p>
@@ -3158,7 +3155,7 @@
           <a:p>
             <a:fld id="{BD986248-06F7-A441-A47A-264EBD310E11}" type="datetimeFigureOut">
               <a:rPr lang="es-CO" smtClean="0"/>
-              <a:t>14/11/2024</a:t>
+              <a:t>22/11/2024</a:t>
             </a:fld>
             <a:endParaRPr lang="es-CO"/>
           </a:p>
@@ -3447,7 +3444,7 @@
           <a:p>
             <a:fld id="{BD986248-06F7-A441-A47A-264EBD310E11}" type="datetimeFigureOut">
               <a:rPr lang="es-CO" smtClean="0"/>
-              <a:t>14/11/2024</a:t>
+              <a:t>22/11/2024</a:t>
             </a:fld>
             <a:endParaRPr lang="es-CO"/>
           </a:p>
@@ -3690,7 +3687,7 @@
           <a:p>
             <a:fld id="{BD986248-06F7-A441-A47A-264EBD310E11}" type="datetimeFigureOut">
               <a:rPr lang="es-CO" smtClean="0"/>
-              <a:t>14/11/2024</a:t>
+              <a:t>22/11/2024</a:t>
             </a:fld>
             <a:endParaRPr lang="es-CO"/>
           </a:p>
@@ -4229,7 +4226,7 @@
         <p:cNvPr id="1" name="">
           <a:extLst>
             <a:ext uri="{FF2B5EF4-FFF2-40B4-BE49-F238E27FC236}">
-              <a16:creationId xmlns:a16="http://schemas.microsoft.com/office/drawing/2014/main" id="{87C03FA3-5C7C-B3D5-9801-25C2D7C050BF}"/>
+              <a16:creationId xmlns:a16="http://schemas.microsoft.com/office/drawing/2014/main" id="{F5C3C95A-D731-1D92-D630-633248900F5F}"/>
             </a:ext>
           </a:extLst>
         </p:cNvPr>
@@ -4249,7 +4246,7 @@
           <p:cNvPr id="2" name="Título 1">
             <a:extLst>
               <a:ext uri="{FF2B5EF4-FFF2-40B4-BE49-F238E27FC236}">
-                <a16:creationId xmlns:a16="http://schemas.microsoft.com/office/drawing/2014/main" id="{F6ECE5EE-E1BF-E2AC-B369-579AE6724C01}"/>
+                <a16:creationId xmlns:a16="http://schemas.microsoft.com/office/drawing/2014/main" id="{BFAE95D6-3850-6CAB-4C0E-EBDD20F110D9}"/>
               </a:ext>
             </a:extLst>
           </p:cNvPr>
@@ -4302,7 +4299,7 @@
                 </a:solidFill>
                 <a:latin typeface="WORK SANS BOLD ROMAN" pitchFamily="2" charset="77"/>
               </a:rPr>
-              <a:t>Vista Ejercicios</a:t>
+              <a:t>Requerimientos funcionales</a:t>
             </a:r>
             <a:endParaRPr kumimoji="0" lang="es-CO" sz="3600" b="1" u="none" strike="noStrike" kern="1200" cap="none" spc="0" normalizeH="0" baseline="0" noProof="0" dirty="0">
               <a:ln>
@@ -4324,7 +4321,7 @@
           <p:cNvPr id="3" name="CuadroTexto 2">
             <a:extLst>
               <a:ext uri="{FF2B5EF4-FFF2-40B4-BE49-F238E27FC236}">
-                <a16:creationId xmlns:a16="http://schemas.microsoft.com/office/drawing/2014/main" id="{4B065862-E189-B609-F8F4-785B09DD2A78}"/>
+                <a16:creationId xmlns:a16="http://schemas.microsoft.com/office/drawing/2014/main" id="{4E32F311-5B25-777D-75A5-5A57487CB9CA}"/>
               </a:ext>
             </a:extLst>
           </p:cNvPr>
@@ -4333,8 +4330,8 @@
         </p:nvSpPr>
         <p:spPr>
           <a:xfrm>
-            <a:off x="1810902" y="1889573"/>
-            <a:ext cx="7637898" cy="1938992"/>
+            <a:off x="456236" y="1158252"/>
+            <a:ext cx="11279528" cy="5541197"/>
           </a:xfrm>
           <a:prstGeom prst="rect">
             <a:avLst/>
@@ -4347,54 +4344,204 @@
           </a:bodyPr>
           <a:lstStyle/>
           <a:p>
-            <a:pPr marL="285750" indent="-285750">
-              <a:buFont typeface="Arial" panose="020B0604020202020204" pitchFamily="34" charset="0"/>
-              <a:buChar char="•"/>
+            <a:pPr marL="342900" lvl="0" indent="-342900">
+              <a:lnSpc>
+                <a:spcPct val="150000"/>
+              </a:lnSpc>
+              <a:spcBef>
+                <a:spcPts val="1400"/>
+              </a:spcBef>
+              <a:spcAft>
+                <a:spcPts val="1400"/>
+              </a:spcAft>
+              <a:buFont typeface="Symbol" panose="05050102010706020507" pitchFamily="18" charset="2"/>
+              <a:buChar char=""/>
             </a:pPr>
             <a:r>
-              <a:rPr lang="es-ES" sz="2000" dirty="0"/>
-              <a:t>El sistema debe permitir crear, leer, actualizar y eliminar ejercicios.</a:t>
-            </a:r>
-          </a:p>
-          <a:p>
-            <a:pPr marL="285750" indent="-285750">
-              <a:buFont typeface="Arial" panose="020B0604020202020204" pitchFamily="34" charset="0"/>
-              <a:buChar char="•"/>
+              <a:rPr lang="es-MX" sz="1600" dirty="0">
+                <a:solidFill>
+                  <a:srgbClr val="000000"/>
+                </a:solidFill>
+                <a:effectLst/>
+                <a:latin typeface="Arial" panose="020B0604020202020204" pitchFamily="34" charset="0"/>
+                <a:ea typeface="Arial" panose="020B0604020202020204" pitchFamily="34" charset="0"/>
+              </a:rPr>
+              <a:t>El sistema debe autenticar a los administradores con su correo y contraseña provenientes de la base de datos y mostrar un mensaje de error si las credenciales son incorrectas.</a:t>
+            </a:r>
+            <a:endParaRPr lang="es-CO" sz="1600" dirty="0">
+              <a:effectLst/>
+              <a:latin typeface="Calibri" panose="020F0502020204030204" pitchFamily="34" charset="0"/>
+              <a:ea typeface="Calibri" panose="020F0502020204030204" pitchFamily="34" charset="0"/>
+            </a:endParaRPr>
+          </a:p>
+          <a:p>
+            <a:pPr marL="342900" lvl="0" indent="-342900">
+              <a:lnSpc>
+                <a:spcPct val="150000"/>
+              </a:lnSpc>
+              <a:spcBef>
+                <a:spcPts val="1400"/>
+              </a:spcBef>
+              <a:spcAft>
+                <a:spcPts val="1400"/>
+              </a:spcAft>
+              <a:buFont typeface="Symbol" panose="05050102010706020507" pitchFamily="18" charset="2"/>
+              <a:buChar char=""/>
             </a:pPr>
             <a:r>
-              <a:rPr lang="es-ES" sz="2000" dirty="0"/>
-              <a:t>Los ejercicios deben estar listados en una tabla para que el administrador pueda visualizarlos.</a:t>
-            </a:r>
-          </a:p>
-          <a:p>
-            <a:pPr marL="285750" indent="-285750">
-              <a:buFont typeface="Arial" panose="020B0604020202020204" pitchFamily="34" charset="0"/>
-              <a:buChar char="•"/>
+              <a:rPr lang="es-MX" sz="1600" dirty="0">
+                <a:solidFill>
+                  <a:srgbClr val="000000"/>
+                </a:solidFill>
+                <a:effectLst/>
+                <a:latin typeface="Arial" panose="020B0604020202020204" pitchFamily="34" charset="0"/>
+                <a:ea typeface="Arial" panose="020B0604020202020204" pitchFamily="34" charset="0"/>
+              </a:rPr>
+              <a:t>El sistema debe verificar si el usuario tiene rol de Administrador, Super Administrador o Usuario, si tiene rol de Usuario negar el acceso.</a:t>
+            </a:r>
+            <a:endParaRPr lang="es-CO" sz="1600" dirty="0">
+              <a:effectLst/>
+              <a:latin typeface="Calibri" panose="020F0502020204030204" pitchFamily="34" charset="0"/>
+              <a:ea typeface="Calibri" panose="020F0502020204030204" pitchFamily="34" charset="0"/>
+            </a:endParaRPr>
+          </a:p>
+          <a:p>
+            <a:pPr marL="342900" lvl="0" indent="-342900">
+              <a:lnSpc>
+                <a:spcPct val="150000"/>
+              </a:lnSpc>
+              <a:spcBef>
+                <a:spcPts val="1400"/>
+              </a:spcBef>
+              <a:spcAft>
+                <a:spcPts val="1400"/>
+              </a:spcAft>
+              <a:buFont typeface="Symbol" panose="05050102010706020507" pitchFamily="18" charset="2"/>
+              <a:buChar char=""/>
             </a:pPr>
             <a:r>
-              <a:rPr lang="es-ES" sz="2000" dirty="0"/>
-              <a:t>Los ejercicios deben ser seleccionables desde la tabla para ser editados o eliminados.</a:t>
-            </a:r>
-          </a:p>
-          <a:p>
-            <a:pPr marL="285750" indent="-285750">
-              <a:buFont typeface="Arial" panose="020B0604020202020204" pitchFamily="34" charset="0"/>
-              <a:buChar char="•"/>
+              <a:rPr lang="es-MX" sz="1600" dirty="0">
+                <a:solidFill>
+                  <a:srgbClr val="000000"/>
+                </a:solidFill>
+                <a:effectLst/>
+                <a:latin typeface="Arial" panose="020B0604020202020204" pitchFamily="34" charset="0"/>
+                <a:ea typeface="Arial" panose="020B0604020202020204" pitchFamily="34" charset="0"/>
+              </a:rPr>
+              <a:t>El sistema debe permitir </a:t>
+            </a:r>
+            <a:r>
+              <a:rPr lang="es-CO" sz="1600" dirty="0">
+                <a:solidFill>
+                  <a:srgbClr val="000000"/>
+                </a:solidFill>
+                <a:effectLst/>
+                <a:latin typeface="Arial" panose="020B0604020202020204" pitchFamily="34" charset="0"/>
+                <a:ea typeface="Arial" panose="020B0604020202020204" pitchFamily="34" charset="0"/>
+              </a:rPr>
+              <a:t>crear, editar, leer y borrar ejercicio, circuitos, rutinas, dietas y planes. En caso de ser Super Administrador debe permitir restablecer cualquier circuito, rutina, dieta o plan.</a:t>
+            </a:r>
+            <a:endParaRPr lang="es-CO" sz="1600" dirty="0">
+              <a:effectLst/>
+              <a:latin typeface="Calibri" panose="020F0502020204030204" pitchFamily="34" charset="0"/>
+              <a:ea typeface="Calibri" panose="020F0502020204030204" pitchFamily="34" charset="0"/>
+            </a:endParaRPr>
+          </a:p>
+          <a:p>
+            <a:pPr marL="342900" lvl="0" indent="-342900">
+              <a:lnSpc>
+                <a:spcPct val="150000"/>
+              </a:lnSpc>
+              <a:spcBef>
+                <a:spcPts val="1400"/>
+              </a:spcBef>
+              <a:spcAft>
+                <a:spcPts val="1400"/>
+              </a:spcAft>
+              <a:buFont typeface="Symbol" panose="05050102010706020507" pitchFamily="18" charset="2"/>
+              <a:buChar char=""/>
             </a:pPr>
             <a:r>
-              <a:rPr lang="es-ES" sz="2000" dirty="0"/>
-              <a:t>La interfaz debe permitir cancelar una acción en proceso.</a:t>
-            </a:r>
-            <a:endParaRPr lang="es-ES" sz="2000" dirty="0">
-              <a:latin typeface="Work Sans Light Roman" pitchFamily="2" charset="77"/>
+              <a:rPr lang="es-CO" sz="1600" dirty="0">
+                <a:solidFill>
+                  <a:srgbClr val="000000"/>
+                </a:solidFill>
+                <a:effectLst/>
+                <a:latin typeface="Arial" panose="020B0604020202020204" pitchFamily="34" charset="0"/>
+                <a:ea typeface="Arial" panose="020B0604020202020204" pitchFamily="34" charset="0"/>
+              </a:rPr>
+              <a:t>El sistema debe permitir editar, leer y borrar usuarios. En caso de ser Super Administrador debe permitir editar el rol y restablecer usuarios.</a:t>
+            </a:r>
+            <a:endParaRPr lang="es-CO" sz="1600" dirty="0">
+              <a:effectLst/>
+              <a:latin typeface="Calibri" panose="020F0502020204030204" pitchFamily="34" charset="0"/>
+              <a:ea typeface="Calibri" panose="020F0502020204030204" pitchFamily="34" charset="0"/>
             </a:endParaRPr>
+          </a:p>
+          <a:p>
+            <a:pPr marL="342900" lvl="0" indent="-342900">
+              <a:lnSpc>
+                <a:spcPct val="150000"/>
+              </a:lnSpc>
+              <a:spcBef>
+                <a:spcPts val="1400"/>
+              </a:spcBef>
+              <a:spcAft>
+                <a:spcPts val="1400"/>
+              </a:spcAft>
+              <a:buFont typeface="Symbol" panose="05050102010706020507" pitchFamily="18" charset="2"/>
+              <a:buChar char=""/>
+            </a:pPr>
+            <a:r>
+              <a:rPr lang="es-CO" sz="1600" dirty="0">
+                <a:solidFill>
+                  <a:srgbClr val="000000"/>
+                </a:solidFill>
+                <a:effectLst/>
+                <a:latin typeface="Arial" panose="020B0604020202020204" pitchFamily="34" charset="0"/>
+                <a:ea typeface="Arial" panose="020B0604020202020204" pitchFamily="34" charset="0"/>
+              </a:rPr>
+              <a:t>La interfaz debe permitir cancelar una acción en proceso (Crear o editar).</a:t>
+            </a:r>
+            <a:endParaRPr lang="es-CO" sz="1600" dirty="0">
+              <a:effectLst/>
+              <a:latin typeface="Calibri" panose="020F0502020204030204" pitchFamily="34" charset="0"/>
+              <a:ea typeface="Calibri" panose="020F0502020204030204" pitchFamily="34" charset="0"/>
+            </a:endParaRPr>
+          </a:p>
+          <a:p>
+            <a:pPr marL="342900" lvl="0" indent="-342900">
+              <a:lnSpc>
+                <a:spcPct val="150000"/>
+              </a:lnSpc>
+              <a:spcBef>
+                <a:spcPts val="1400"/>
+              </a:spcBef>
+              <a:spcAft>
+                <a:spcPts val="1400"/>
+              </a:spcAft>
+              <a:buFont typeface="Symbol" panose="05050102010706020507" pitchFamily="18" charset="2"/>
+              <a:buChar char=""/>
+            </a:pPr>
+            <a:r>
+              <a:rPr lang="es-MX" sz="1600" dirty="0">
+                <a:solidFill>
+                  <a:srgbClr val="000000"/>
+                </a:solidFill>
+                <a:effectLst/>
+                <a:latin typeface="Arial" panose="020B0604020202020204" pitchFamily="34" charset="0"/>
+                <a:ea typeface="Arial" panose="020B0604020202020204" pitchFamily="34" charset="0"/>
+              </a:rPr>
+              <a:t>Los campos solo deben recibir datos del tipo permitido en cada campo (número y/o letras).</a:t>
+            </a:r>
+            <a:endParaRPr lang="es-ES" sz="2000" dirty="0"/>
           </a:p>
         </p:txBody>
       </p:sp>
     </p:spTree>
     <p:extLst>
       <p:ext uri="{BB962C8B-B14F-4D97-AF65-F5344CB8AC3E}">
-        <p14:creationId xmlns:p14="http://schemas.microsoft.com/office/powerpoint/2010/main" val="768074239"/>
+        <p14:creationId xmlns:p14="http://schemas.microsoft.com/office/powerpoint/2010/main" val="3138653505"/>
       </p:ext>
     </p:extLst>
   </p:cSld>
@@ -4405,581 +4552,6 @@
 </file>
 
 <file path=ppt/slides/slide11.xml><?xml version="1.0" encoding="utf-8"?>
-<p:sld xmlns:a="http://schemas.openxmlformats.org/drawingml/2006/main" xmlns:r="http://schemas.openxmlformats.org/officeDocument/2006/relationships" xmlns:p="http://schemas.openxmlformats.org/presentationml/2006/main">
-  <p:cSld>
-    <p:spTree>
-      <p:nvGrpSpPr>
-        <p:cNvPr id="1" name="">
-          <a:extLst>
-            <a:ext uri="{FF2B5EF4-FFF2-40B4-BE49-F238E27FC236}">
-              <a16:creationId xmlns:a16="http://schemas.microsoft.com/office/drawing/2014/main" id="{A7CB1FC7-45EC-7A92-5EAA-65182D6BE181}"/>
-            </a:ext>
-          </a:extLst>
-        </p:cNvPr>
-        <p:cNvGrpSpPr/>
-        <p:nvPr/>
-      </p:nvGrpSpPr>
-      <p:grpSpPr>
-        <a:xfrm>
-          <a:off x="0" y="0"/>
-          <a:ext cx="0" cy="0"/>
-          <a:chOff x="0" y="0"/>
-          <a:chExt cx="0" cy="0"/>
-        </a:xfrm>
-      </p:grpSpPr>
-      <p:sp>
-        <p:nvSpPr>
-          <p:cNvPr id="2" name="Título 1">
-            <a:extLst>
-              <a:ext uri="{FF2B5EF4-FFF2-40B4-BE49-F238E27FC236}">
-                <a16:creationId xmlns:a16="http://schemas.microsoft.com/office/drawing/2014/main" id="{6F9E36DB-3F02-ACE9-B590-FE9837542CF9}"/>
-              </a:ext>
-            </a:extLst>
-          </p:cNvPr>
-          <p:cNvSpPr txBox="1">
-            <a:spLocks/>
-          </p:cNvSpPr>
-          <p:nvPr/>
-        </p:nvSpPr>
-        <p:spPr>
-          <a:xfrm>
-            <a:off x="456236" y="416689"/>
-            <a:ext cx="9815809" cy="741563"/>
-          </a:xfrm>
-          <a:prstGeom prst="rect">
-            <a:avLst/>
-          </a:prstGeom>
-          <a:ln>
-            <a:noFill/>
-          </a:ln>
-        </p:spPr>
-        <p:txBody>
-          <a:bodyPr/>
-          <a:lstStyle>
-            <a:lvl1pPr algn="l" defTabSz="914400" rtl="0" eaLnBrk="1" latinLnBrk="0" hangingPunct="1">
-              <a:lnSpc>
-                <a:spcPct val="90000"/>
-              </a:lnSpc>
-              <a:spcBef>
-                <a:spcPct val="0"/>
-              </a:spcBef>
-              <a:buNone/>
-              <a:defRPr sz="4400" kern="1200">
-                <a:solidFill>
-                  <a:schemeClr val="tx1"/>
-                </a:solidFill>
-                <a:latin typeface="+mj-lt"/>
-                <a:ea typeface="+mj-ea"/>
-                <a:cs typeface="+mj-cs"/>
-              </a:defRPr>
-            </a:lvl1pPr>
-          </a:lstStyle>
-          <a:p>
-            <a:pPr lvl="0">
-              <a:defRPr/>
-            </a:pPr>
-            <a:r>
-              <a:rPr lang="es-CO" sz="3600" b="1" dirty="0">
-                <a:solidFill>
-                  <a:srgbClr val="4D4D4C"/>
-                </a:solidFill>
-                <a:latin typeface="WORK SANS BOLD ROMAN" pitchFamily="2" charset="77"/>
-              </a:rPr>
-              <a:t>Vista Rutina</a:t>
-            </a:r>
-            <a:endParaRPr kumimoji="0" lang="es-CO" sz="3600" b="1" u="none" strike="noStrike" kern="1200" cap="none" spc="0" normalizeH="0" baseline="0" noProof="0" dirty="0">
-              <a:ln>
-                <a:noFill/>
-              </a:ln>
-              <a:solidFill>
-                <a:srgbClr val="4D4D4C"/>
-              </a:solidFill>
-              <a:effectLst/>
-              <a:uLnTx/>
-              <a:uFillTx/>
-              <a:latin typeface="WORK SANS BOLD ROMAN" pitchFamily="2" charset="77"/>
-            </a:endParaRPr>
-          </a:p>
-        </p:txBody>
-      </p:sp>
-      <p:sp>
-        <p:nvSpPr>
-          <p:cNvPr id="3" name="CuadroTexto 2">
-            <a:extLst>
-              <a:ext uri="{FF2B5EF4-FFF2-40B4-BE49-F238E27FC236}">
-                <a16:creationId xmlns:a16="http://schemas.microsoft.com/office/drawing/2014/main" id="{C2C88092-6350-C94C-EBB6-EF6CD170A48B}"/>
-              </a:ext>
-            </a:extLst>
-          </p:cNvPr>
-          <p:cNvSpPr txBox="1"/>
-          <p:nvPr/>
-        </p:nvSpPr>
-        <p:spPr>
-          <a:xfrm>
-            <a:off x="1810902" y="1889573"/>
-            <a:ext cx="7637898" cy="3785652"/>
-          </a:xfrm>
-          <a:prstGeom prst="rect">
-            <a:avLst/>
-          </a:prstGeom>
-          <a:noFill/>
-        </p:spPr>
-        <p:txBody>
-          <a:bodyPr wrap="square" rtlCol="0">
-            <a:spAutoFit/>
-          </a:bodyPr>
-          <a:lstStyle/>
-          <a:p>
-            <a:pPr marL="285750" indent="-285750">
-              <a:buFont typeface="Arial" panose="020B0604020202020204" pitchFamily="34" charset="0"/>
-              <a:buChar char="•"/>
-            </a:pPr>
-            <a:r>
-              <a:rPr lang="es-ES" sz="2000" dirty="0"/>
-              <a:t>El sistema debe permitir crear, leer, actualizar y eliminar (CRUD) rutinas.</a:t>
-            </a:r>
-          </a:p>
-          <a:p>
-            <a:pPr marL="285750" indent="-285750">
-              <a:buFont typeface="Arial" panose="020B0604020202020204" pitchFamily="34" charset="0"/>
-              <a:buChar char="•"/>
-            </a:pPr>
-            <a:r>
-              <a:rPr lang="es-ES" sz="2000" dirty="0"/>
-              <a:t>Las rutinas deben ser seleccionables desde la tabla para ser editados o eliminados.</a:t>
-            </a:r>
-          </a:p>
-          <a:p>
-            <a:pPr marL="285750" indent="-285750">
-              <a:buFont typeface="Arial" panose="020B0604020202020204" pitchFamily="34" charset="0"/>
-              <a:buChar char="•"/>
-            </a:pPr>
-            <a:r>
-              <a:rPr lang="es-ES" sz="2000" dirty="0">
-                <a:latin typeface="Work Sans Light Roman" pitchFamily="2" charset="77"/>
-              </a:rPr>
-              <a:t>El sistema debe permitir listar en combo box las rutinas para ser listadas </a:t>
-            </a:r>
-          </a:p>
-          <a:p>
-            <a:pPr marL="285750" indent="-285750">
-              <a:buFont typeface="Arial" panose="020B0604020202020204" pitchFamily="34" charset="0"/>
-              <a:buChar char="•"/>
-            </a:pPr>
-            <a:r>
-              <a:rPr lang="es-ES" sz="2000" dirty="0">
-                <a:latin typeface="Work Sans Light Roman" pitchFamily="2" charset="77"/>
-              </a:rPr>
-              <a:t>El sistema debe permitir crear, leer, actualizar y eliminar los circuitos emparejados a la rutina.</a:t>
-            </a:r>
-          </a:p>
-          <a:p>
-            <a:pPr marL="285750" indent="-285750">
-              <a:buFont typeface="Arial" panose="020B0604020202020204" pitchFamily="34" charset="0"/>
-              <a:buChar char="•"/>
-            </a:pPr>
-            <a:r>
-              <a:rPr lang="es-ES" sz="2000" dirty="0">
-                <a:latin typeface="Work Sans Light Roman" pitchFamily="2" charset="77"/>
-              </a:rPr>
-              <a:t>Los circuitos emparejados a la rutina deben ser seleccionables desde la tabla para ser editados o eliminados.</a:t>
-            </a:r>
-          </a:p>
-          <a:p>
-            <a:pPr marL="285750" indent="-285750">
-              <a:buFont typeface="Arial" panose="020B0604020202020204" pitchFamily="34" charset="0"/>
-              <a:buChar char="•"/>
-            </a:pPr>
-            <a:r>
-              <a:rPr lang="es-ES" sz="2000" dirty="0"/>
-              <a:t>La interfaz debe permitir cancelar una acción en proceso (crear o editar un circuito).</a:t>
-            </a:r>
-            <a:endParaRPr lang="es-ES" sz="2000" dirty="0">
-              <a:latin typeface="Work Sans Light Roman" pitchFamily="2" charset="77"/>
-            </a:endParaRPr>
-          </a:p>
-        </p:txBody>
-      </p:sp>
-    </p:spTree>
-    <p:extLst>
-      <p:ext uri="{BB962C8B-B14F-4D97-AF65-F5344CB8AC3E}">
-        <p14:creationId xmlns:p14="http://schemas.microsoft.com/office/powerpoint/2010/main" val="981792974"/>
-      </p:ext>
-    </p:extLst>
-  </p:cSld>
-  <p:clrMapOvr>
-    <a:masterClrMapping/>
-  </p:clrMapOvr>
-</p:sld>
-</file>
-
-<file path=ppt/slides/slide12.xml><?xml version="1.0" encoding="utf-8"?>
-<p:sld xmlns:a="http://schemas.openxmlformats.org/drawingml/2006/main" xmlns:r="http://schemas.openxmlformats.org/officeDocument/2006/relationships" xmlns:p="http://schemas.openxmlformats.org/presentationml/2006/main">
-  <p:cSld>
-    <p:spTree>
-      <p:nvGrpSpPr>
-        <p:cNvPr id="1" name="">
-          <a:extLst>
-            <a:ext uri="{FF2B5EF4-FFF2-40B4-BE49-F238E27FC236}">
-              <a16:creationId xmlns:a16="http://schemas.microsoft.com/office/drawing/2014/main" id="{D9EFD704-06F6-C7C2-5BFC-374B147CE174}"/>
-            </a:ext>
-          </a:extLst>
-        </p:cNvPr>
-        <p:cNvGrpSpPr/>
-        <p:nvPr/>
-      </p:nvGrpSpPr>
-      <p:grpSpPr>
-        <a:xfrm>
-          <a:off x="0" y="0"/>
-          <a:ext cx="0" cy="0"/>
-          <a:chOff x="0" y="0"/>
-          <a:chExt cx="0" cy="0"/>
-        </a:xfrm>
-      </p:grpSpPr>
-      <p:sp>
-        <p:nvSpPr>
-          <p:cNvPr id="2" name="Título 1">
-            <a:extLst>
-              <a:ext uri="{FF2B5EF4-FFF2-40B4-BE49-F238E27FC236}">
-                <a16:creationId xmlns:a16="http://schemas.microsoft.com/office/drawing/2014/main" id="{AB2C282B-CE6F-51D7-F681-0325559B9921}"/>
-              </a:ext>
-            </a:extLst>
-          </p:cNvPr>
-          <p:cNvSpPr txBox="1">
-            <a:spLocks/>
-          </p:cNvSpPr>
-          <p:nvPr/>
-        </p:nvSpPr>
-        <p:spPr>
-          <a:xfrm>
-            <a:off x="456236" y="416689"/>
-            <a:ext cx="9815809" cy="741563"/>
-          </a:xfrm>
-          <a:prstGeom prst="rect">
-            <a:avLst/>
-          </a:prstGeom>
-          <a:ln>
-            <a:noFill/>
-          </a:ln>
-        </p:spPr>
-        <p:txBody>
-          <a:bodyPr/>
-          <a:lstStyle>
-            <a:lvl1pPr algn="l" defTabSz="914400" rtl="0" eaLnBrk="1" latinLnBrk="0" hangingPunct="1">
-              <a:lnSpc>
-                <a:spcPct val="90000"/>
-              </a:lnSpc>
-              <a:spcBef>
-                <a:spcPct val="0"/>
-              </a:spcBef>
-              <a:buNone/>
-              <a:defRPr sz="4400" kern="1200">
-                <a:solidFill>
-                  <a:schemeClr val="tx1"/>
-                </a:solidFill>
-                <a:latin typeface="+mj-lt"/>
-                <a:ea typeface="+mj-ea"/>
-                <a:cs typeface="+mj-cs"/>
-              </a:defRPr>
-            </a:lvl1pPr>
-          </a:lstStyle>
-          <a:p>
-            <a:pPr lvl="0">
-              <a:defRPr/>
-            </a:pPr>
-            <a:r>
-              <a:rPr lang="es-CO" sz="3600" b="1" dirty="0">
-                <a:solidFill>
-                  <a:srgbClr val="4D4D4C"/>
-                </a:solidFill>
-                <a:latin typeface="WORK SANS BOLD ROMAN" pitchFamily="2" charset="77"/>
-              </a:rPr>
-              <a:t>Vista Usuario</a:t>
-            </a:r>
-            <a:endParaRPr kumimoji="0" lang="es-CO" sz="3600" b="1" u="none" strike="noStrike" kern="1200" cap="none" spc="0" normalizeH="0" baseline="0" noProof="0" dirty="0">
-              <a:ln>
-                <a:noFill/>
-              </a:ln>
-              <a:solidFill>
-                <a:srgbClr val="4D4D4C"/>
-              </a:solidFill>
-              <a:effectLst/>
-              <a:uLnTx/>
-              <a:uFillTx/>
-              <a:latin typeface="WORK SANS BOLD ROMAN" pitchFamily="2" charset="77"/>
-            </a:endParaRPr>
-          </a:p>
-        </p:txBody>
-      </p:sp>
-      <p:sp>
-        <p:nvSpPr>
-          <p:cNvPr id="3" name="CuadroTexto 2">
-            <a:extLst>
-              <a:ext uri="{FF2B5EF4-FFF2-40B4-BE49-F238E27FC236}">
-                <a16:creationId xmlns:a16="http://schemas.microsoft.com/office/drawing/2014/main" id="{9F868EC8-2558-E62E-AA93-8AAB5CF8F7FF}"/>
-              </a:ext>
-            </a:extLst>
-          </p:cNvPr>
-          <p:cNvSpPr txBox="1"/>
-          <p:nvPr/>
-        </p:nvSpPr>
-        <p:spPr>
-          <a:xfrm>
-            <a:off x="1810902" y="1889573"/>
-            <a:ext cx="7637898" cy="1938992"/>
-          </a:xfrm>
-          <a:prstGeom prst="rect">
-            <a:avLst/>
-          </a:prstGeom>
-          <a:noFill/>
-        </p:spPr>
-        <p:txBody>
-          <a:bodyPr wrap="square" rtlCol="0">
-            <a:spAutoFit/>
-          </a:bodyPr>
-          <a:lstStyle/>
-          <a:p>
-            <a:pPr marL="285750" indent="-285750">
-              <a:buFont typeface="Arial" panose="020B0604020202020204" pitchFamily="34" charset="0"/>
-              <a:buChar char="•"/>
-            </a:pPr>
-            <a:r>
-              <a:rPr lang="es-ES" sz="2000" dirty="0"/>
-              <a:t>El sistema debe permitir leer, actualizar y eliminar usuarios.</a:t>
-            </a:r>
-          </a:p>
-          <a:p>
-            <a:pPr marL="285750" indent="-285750">
-              <a:buFont typeface="Arial" panose="020B0604020202020204" pitchFamily="34" charset="0"/>
-              <a:buChar char="•"/>
-            </a:pPr>
-            <a:r>
-              <a:rPr lang="es-ES" sz="2000" dirty="0"/>
-              <a:t>Los usuarios deben estar listadas en una tabla para que los administrador puedan visualizarlos.</a:t>
-            </a:r>
-          </a:p>
-          <a:p>
-            <a:pPr marL="285750" indent="-285750">
-              <a:buFont typeface="Arial" panose="020B0604020202020204" pitchFamily="34" charset="0"/>
-              <a:buChar char="•"/>
-            </a:pPr>
-            <a:r>
-              <a:rPr lang="es-ES" sz="2000" dirty="0"/>
-              <a:t>Los usuarios deben ser seleccionables desde la tabla para ser editados o eliminados. </a:t>
-            </a:r>
-          </a:p>
-          <a:p>
-            <a:pPr marL="285750" indent="-285750">
-              <a:buFont typeface="Arial" panose="020B0604020202020204" pitchFamily="34" charset="0"/>
-              <a:buChar char="•"/>
-            </a:pPr>
-            <a:r>
-              <a:rPr lang="es-ES" sz="2000" dirty="0"/>
-              <a:t>La interfaz debe permitir cancelar una acción en proceso.</a:t>
-            </a:r>
-            <a:endParaRPr lang="es-ES" sz="2000" dirty="0">
-              <a:latin typeface="Work Sans Light Roman" pitchFamily="2" charset="77"/>
-            </a:endParaRPr>
-          </a:p>
-        </p:txBody>
-      </p:sp>
-    </p:spTree>
-    <p:extLst>
-      <p:ext uri="{BB962C8B-B14F-4D97-AF65-F5344CB8AC3E}">
-        <p14:creationId xmlns:p14="http://schemas.microsoft.com/office/powerpoint/2010/main" val="2805720870"/>
-      </p:ext>
-    </p:extLst>
-  </p:cSld>
-  <p:clrMapOvr>
-    <a:masterClrMapping/>
-  </p:clrMapOvr>
-</p:sld>
-</file>
-
-<file path=ppt/slides/slide13.xml><?xml version="1.0" encoding="utf-8"?>
-<p:sld xmlns:a="http://schemas.openxmlformats.org/drawingml/2006/main" xmlns:r="http://schemas.openxmlformats.org/officeDocument/2006/relationships" xmlns:p="http://schemas.openxmlformats.org/presentationml/2006/main">
-  <p:cSld>
-    <p:spTree>
-      <p:nvGrpSpPr>
-        <p:cNvPr id="1" name="">
-          <a:extLst>
-            <a:ext uri="{FF2B5EF4-FFF2-40B4-BE49-F238E27FC236}">
-              <a16:creationId xmlns:a16="http://schemas.microsoft.com/office/drawing/2014/main" id="{8EBFC8C8-A172-7ABF-DD96-5C77F4D91625}"/>
-            </a:ext>
-          </a:extLst>
-        </p:cNvPr>
-        <p:cNvGrpSpPr/>
-        <p:nvPr/>
-      </p:nvGrpSpPr>
-      <p:grpSpPr>
-        <a:xfrm>
-          <a:off x="0" y="0"/>
-          <a:ext cx="0" cy="0"/>
-          <a:chOff x="0" y="0"/>
-          <a:chExt cx="0" cy="0"/>
-        </a:xfrm>
-      </p:grpSpPr>
-      <p:sp>
-        <p:nvSpPr>
-          <p:cNvPr id="2" name="Título 1">
-            <a:extLst>
-              <a:ext uri="{FF2B5EF4-FFF2-40B4-BE49-F238E27FC236}">
-                <a16:creationId xmlns:a16="http://schemas.microsoft.com/office/drawing/2014/main" id="{6C5E9FF4-D509-2340-F5A0-FC1C63EF29B6}"/>
-              </a:ext>
-            </a:extLst>
-          </p:cNvPr>
-          <p:cNvSpPr txBox="1">
-            <a:spLocks/>
-          </p:cNvSpPr>
-          <p:nvPr/>
-        </p:nvSpPr>
-        <p:spPr>
-          <a:xfrm>
-            <a:off x="456236" y="416689"/>
-            <a:ext cx="9815809" cy="741563"/>
-          </a:xfrm>
-          <a:prstGeom prst="rect">
-            <a:avLst/>
-          </a:prstGeom>
-          <a:ln>
-            <a:noFill/>
-          </a:ln>
-        </p:spPr>
-        <p:txBody>
-          <a:bodyPr/>
-          <a:lstStyle>
-            <a:lvl1pPr algn="l" defTabSz="914400" rtl="0" eaLnBrk="1" latinLnBrk="0" hangingPunct="1">
-              <a:lnSpc>
-                <a:spcPct val="90000"/>
-              </a:lnSpc>
-              <a:spcBef>
-                <a:spcPct val="0"/>
-              </a:spcBef>
-              <a:buNone/>
-              <a:defRPr sz="4400" kern="1200">
-                <a:solidFill>
-                  <a:schemeClr val="tx1"/>
-                </a:solidFill>
-                <a:latin typeface="+mj-lt"/>
-                <a:ea typeface="+mj-ea"/>
-                <a:cs typeface="+mj-cs"/>
-              </a:defRPr>
-            </a:lvl1pPr>
-          </a:lstStyle>
-          <a:p>
-            <a:pPr lvl="0">
-              <a:defRPr/>
-            </a:pPr>
-            <a:r>
-              <a:rPr lang="es-CO" sz="3600" b="1" dirty="0">
-                <a:solidFill>
-                  <a:srgbClr val="4D4D4C"/>
-                </a:solidFill>
-                <a:latin typeface="WORK SANS BOLD ROMAN" pitchFamily="2" charset="77"/>
-              </a:rPr>
-              <a:t>Vista Plan</a:t>
-            </a:r>
-            <a:endParaRPr kumimoji="0" lang="es-CO" sz="3600" b="1" u="none" strike="noStrike" kern="1200" cap="none" spc="0" normalizeH="0" baseline="0" noProof="0" dirty="0">
-              <a:ln>
-                <a:noFill/>
-              </a:ln>
-              <a:solidFill>
-                <a:srgbClr val="4D4D4C"/>
-              </a:solidFill>
-              <a:effectLst/>
-              <a:uLnTx/>
-              <a:uFillTx/>
-              <a:latin typeface="WORK SANS BOLD ROMAN" pitchFamily="2" charset="77"/>
-            </a:endParaRPr>
-          </a:p>
-        </p:txBody>
-      </p:sp>
-      <p:sp>
-        <p:nvSpPr>
-          <p:cNvPr id="3" name="CuadroTexto 2">
-            <a:extLst>
-              <a:ext uri="{FF2B5EF4-FFF2-40B4-BE49-F238E27FC236}">
-                <a16:creationId xmlns:a16="http://schemas.microsoft.com/office/drawing/2014/main" id="{5702FF4B-5FFA-A3A0-04A8-C3FA2F5C07E2}"/>
-              </a:ext>
-            </a:extLst>
-          </p:cNvPr>
-          <p:cNvSpPr txBox="1"/>
-          <p:nvPr/>
-        </p:nvSpPr>
-        <p:spPr>
-          <a:xfrm>
-            <a:off x="1810902" y="1889573"/>
-            <a:ext cx="7637898" cy="1938992"/>
-          </a:xfrm>
-          <a:prstGeom prst="rect">
-            <a:avLst/>
-          </a:prstGeom>
-          <a:noFill/>
-        </p:spPr>
-        <p:txBody>
-          <a:bodyPr wrap="square" rtlCol="0">
-            <a:spAutoFit/>
-          </a:bodyPr>
-          <a:lstStyle/>
-          <a:p>
-            <a:pPr marL="285750" indent="-285750">
-              <a:buFont typeface="Arial" panose="020B0604020202020204" pitchFamily="34" charset="0"/>
-              <a:buChar char="•"/>
-            </a:pPr>
-            <a:r>
-              <a:rPr lang="es-ES" sz="2000" dirty="0"/>
-              <a:t>El sistema debe permitir leer, actualizar y eliminar planes.</a:t>
-            </a:r>
-          </a:p>
-          <a:p>
-            <a:pPr marL="285750" indent="-285750">
-              <a:buFont typeface="Arial" panose="020B0604020202020204" pitchFamily="34" charset="0"/>
-              <a:buChar char="•"/>
-            </a:pPr>
-            <a:r>
-              <a:rPr lang="es-ES" sz="2000" dirty="0"/>
-              <a:t>Los planes deben estar listadas en una tabla para que los administrador puedan visualizarlos.</a:t>
-            </a:r>
-          </a:p>
-          <a:p>
-            <a:pPr marL="285750" indent="-285750">
-              <a:buFont typeface="Arial" panose="020B0604020202020204" pitchFamily="34" charset="0"/>
-              <a:buChar char="•"/>
-            </a:pPr>
-            <a:r>
-              <a:rPr lang="es-ES" sz="2000" dirty="0"/>
-              <a:t>Los planes deben ser seleccionables desde la tabla para ser editados o eliminados. </a:t>
-            </a:r>
-          </a:p>
-          <a:p>
-            <a:pPr marL="285750" indent="-285750">
-              <a:buFont typeface="Arial" panose="020B0604020202020204" pitchFamily="34" charset="0"/>
-              <a:buChar char="•"/>
-            </a:pPr>
-            <a:r>
-              <a:rPr lang="es-ES" sz="2000" dirty="0"/>
-              <a:t>La interfaz debe permitir cancelar una acción en proceso.</a:t>
-            </a:r>
-            <a:endParaRPr lang="es-ES" sz="2000" dirty="0">
-              <a:latin typeface="Work Sans Light Roman" pitchFamily="2" charset="77"/>
-            </a:endParaRPr>
-          </a:p>
-        </p:txBody>
-      </p:sp>
-    </p:spTree>
-    <p:extLst>
-      <p:ext uri="{BB962C8B-B14F-4D97-AF65-F5344CB8AC3E}">
-        <p14:creationId xmlns:p14="http://schemas.microsoft.com/office/powerpoint/2010/main" val="581877594"/>
-      </p:ext>
-    </p:extLst>
-  </p:cSld>
-  <p:clrMapOvr>
-    <a:masterClrMapping/>
-  </p:clrMapOvr>
-</p:sld>
-</file>
-
-<file path=ppt/slides/slide14.xml><?xml version="1.0" encoding="utf-8"?>
 <p:sld xmlns:a="http://schemas.openxmlformats.org/drawingml/2006/main" xmlns:r="http://schemas.openxmlformats.org/officeDocument/2006/relationships" xmlns:p="http://schemas.openxmlformats.org/presentationml/2006/main">
   <p:cSld>
     <p:spTree>
@@ -5209,7 +4781,7 @@
 </p:sld>
 </file>
 
-<file path=ppt/slides/slide15.xml><?xml version="1.0" encoding="utf-8"?>
+<file path=ppt/slides/slide12.xml><?xml version="1.0" encoding="utf-8"?>
 <p:sld xmlns:a="http://schemas.openxmlformats.org/drawingml/2006/main" xmlns:r="http://schemas.openxmlformats.org/officeDocument/2006/relationships" xmlns:p="http://schemas.openxmlformats.org/presentationml/2006/main">
   <p:cSld>
     <p:spTree>
@@ -5322,7 +4894,7 @@
         <p:spPr>
           <a:xfrm>
             <a:off x="456236" y="1158252"/>
-            <a:ext cx="11279528" cy="4093428"/>
+            <a:ext cx="11279528" cy="5119350"/>
           </a:xfrm>
           <a:prstGeom prst="rect">
             <a:avLst/>
@@ -5335,82 +4907,298 @@
           </a:bodyPr>
           <a:lstStyle/>
           <a:p>
-            <a:pPr marL="285750" indent="-285750">
-              <a:buFont typeface="Arial" panose="020B0604020202020204" pitchFamily="34" charset="0"/>
-              <a:buChar char="•"/>
+            <a:pPr marL="342900" lvl="0" indent="-342900">
+              <a:lnSpc>
+                <a:spcPct val="150000"/>
+              </a:lnSpc>
+              <a:buFont typeface="Symbol" panose="05050102010706020507" pitchFamily="18" charset="2"/>
+              <a:buChar char=""/>
             </a:pPr>
             <a:r>
-              <a:rPr lang="es-ES" sz="2000" dirty="0"/>
-              <a:t>Debe haber un manejo adecuado de las sesiones para evitar accesos no autorizados.</a:t>
-            </a:r>
-          </a:p>
-          <a:p>
-            <a:endParaRPr lang="es-ES" sz="2000" dirty="0"/>
-          </a:p>
-          <a:p>
-            <a:pPr marL="285750" indent="-285750">
-              <a:buFont typeface="Arial" panose="020B0604020202020204" pitchFamily="34" charset="0"/>
-              <a:buChar char="•"/>
+              <a:rPr lang="es-CO" sz="1600" dirty="0">
+                <a:solidFill>
+                  <a:srgbClr val="000000"/>
+                </a:solidFill>
+                <a:effectLst/>
+                <a:latin typeface="Arial" panose="020B0604020202020204" pitchFamily="34" charset="0"/>
+                <a:ea typeface="Arial" panose="020B0604020202020204" pitchFamily="34" charset="0"/>
+              </a:rPr>
+              <a:t>Mantener una interfaz fácil de usar y navegar.</a:t>
+            </a:r>
+            <a:endParaRPr lang="es-CO" sz="1600" dirty="0">
+              <a:effectLst/>
+              <a:latin typeface="Calibri" panose="020F0502020204030204" pitchFamily="34" charset="0"/>
+              <a:ea typeface="Calibri" panose="020F0502020204030204" pitchFamily="34" charset="0"/>
+            </a:endParaRPr>
+          </a:p>
+          <a:p>
+            <a:pPr marL="342900" lvl="0" indent="-342900">
+              <a:lnSpc>
+                <a:spcPct val="150000"/>
+              </a:lnSpc>
+              <a:buFont typeface="Symbol" panose="05050102010706020507" pitchFamily="18" charset="2"/>
+              <a:buChar char=""/>
             </a:pPr>
             <a:r>
-              <a:rPr lang="es-ES" sz="2000" dirty="0"/>
-              <a:t>La interfaz gráfica debe ser intuitiva y fácil de usar.</a:t>
-            </a:r>
-          </a:p>
-          <a:p>
-            <a:pPr marL="285750" indent="-285750">
-              <a:buFont typeface="Arial" panose="020B0604020202020204" pitchFamily="34" charset="0"/>
-              <a:buChar char="•"/>
+              <a:rPr lang="es-CO" sz="1600" dirty="0">
+                <a:solidFill>
+                  <a:srgbClr val="000000"/>
+                </a:solidFill>
+                <a:effectLst/>
+                <a:latin typeface="Arial" panose="020B0604020202020204" pitchFamily="34" charset="0"/>
+                <a:ea typeface="Arial" panose="020B0604020202020204" pitchFamily="34" charset="0"/>
+              </a:rPr>
+              <a:t>Facilitar el mantenimiento y actualizaciones.</a:t>
+            </a:r>
+            <a:endParaRPr lang="es-CO" sz="1600" dirty="0">
+              <a:effectLst/>
+              <a:latin typeface="Calibri" panose="020F0502020204030204" pitchFamily="34" charset="0"/>
+              <a:ea typeface="Calibri" panose="020F0502020204030204" pitchFamily="34" charset="0"/>
+            </a:endParaRPr>
+          </a:p>
+          <a:p>
+            <a:pPr marL="342900" lvl="0" indent="-342900">
+              <a:lnSpc>
+                <a:spcPct val="150000"/>
+              </a:lnSpc>
+              <a:buFont typeface="Symbol" panose="05050102010706020507" pitchFamily="18" charset="2"/>
+              <a:buChar char=""/>
             </a:pPr>
-            <a:endParaRPr lang="es-ES" sz="2000" dirty="0"/>
-          </a:p>
-          <a:p>
-            <a:pPr marL="285750" indent="-285750">
-              <a:buFont typeface="Arial" panose="020B0604020202020204" pitchFamily="34" charset="0"/>
-              <a:buChar char="•"/>
+            <a:r>
+              <a:rPr lang="es-CO" sz="1600" dirty="0">
+                <a:solidFill>
+                  <a:srgbClr val="000000"/>
+                </a:solidFill>
+                <a:effectLst/>
+                <a:latin typeface="Arial" panose="020B0604020202020204" pitchFamily="34" charset="0"/>
+                <a:ea typeface="Arial" panose="020B0604020202020204" pitchFamily="34" charset="0"/>
+              </a:rPr>
+              <a:t>Estructurar el código de manera que sea escalable en el futuro.</a:t>
+            </a:r>
+            <a:endParaRPr lang="es-CO" sz="1600" dirty="0">
+              <a:effectLst/>
+              <a:latin typeface="Calibri" panose="020F0502020204030204" pitchFamily="34" charset="0"/>
+              <a:ea typeface="Calibri" panose="020F0502020204030204" pitchFamily="34" charset="0"/>
+            </a:endParaRPr>
+          </a:p>
+          <a:p>
+            <a:pPr marL="342900" lvl="0" indent="-342900">
+              <a:lnSpc>
+                <a:spcPct val="150000"/>
+              </a:lnSpc>
+              <a:buFont typeface="Symbol" panose="05050102010706020507" pitchFamily="18" charset="2"/>
+              <a:buChar char=""/>
             </a:pPr>
             <a:r>
-              <a:rPr lang="es-ES" sz="2000" dirty="0"/>
-              <a:t>Los campos solo deben recibir datos del tipo permitido (números y/o letras).</a:t>
-            </a:r>
-          </a:p>
-          <a:p>
-            <a:pPr marL="285750" indent="-285750">
-              <a:buFont typeface="Arial" panose="020B0604020202020204" pitchFamily="34" charset="0"/>
-              <a:buChar char="•"/>
+              <a:rPr lang="es-CO" sz="1600" dirty="0">
+                <a:solidFill>
+                  <a:srgbClr val="000000"/>
+                </a:solidFill>
+                <a:effectLst/>
+                <a:latin typeface="Arial" panose="020B0604020202020204" pitchFamily="34" charset="0"/>
+                <a:ea typeface="Arial" panose="020B0604020202020204" pitchFamily="34" charset="0"/>
+              </a:rPr>
+              <a:t>Tener el gestor de proyectos Apache NetBeans IDE 22 (o superior) para lanzar el aplicativo de escritorio.</a:t>
+            </a:r>
+            <a:endParaRPr lang="es-CO" sz="1600" dirty="0">
+              <a:effectLst/>
+              <a:latin typeface="Calibri" panose="020F0502020204030204" pitchFamily="34" charset="0"/>
+              <a:ea typeface="Calibri" panose="020F0502020204030204" pitchFamily="34" charset="0"/>
+            </a:endParaRPr>
+          </a:p>
+          <a:p>
+            <a:pPr marL="342900" lvl="0" indent="-342900">
+              <a:lnSpc>
+                <a:spcPct val="150000"/>
+              </a:lnSpc>
+              <a:buFont typeface="Symbol" panose="05050102010706020507" pitchFamily="18" charset="2"/>
+              <a:buChar char=""/>
             </a:pPr>
-            <a:endParaRPr lang="es-ES" sz="2000" dirty="0"/>
-          </a:p>
-          <a:p>
-            <a:pPr marL="285750" indent="-285750">
-              <a:buFont typeface="Arial" panose="020B0604020202020204" pitchFamily="34" charset="0"/>
-              <a:buChar char="•"/>
+            <a:r>
+              <a:rPr lang="es-ES" sz="1600" dirty="0">
+                <a:solidFill>
+                  <a:srgbClr val="000000"/>
+                </a:solidFill>
+                <a:effectLst/>
+                <a:latin typeface="Arial" panose="020B0604020202020204" pitchFamily="34" charset="0"/>
+                <a:ea typeface="Arial" panose="020B0604020202020204" pitchFamily="34" charset="0"/>
+              </a:rPr>
+              <a:t>Tener MYSQL instalado en el sistema junto con </a:t>
+            </a:r>
+            <a:r>
+              <a:rPr lang="es-ES" sz="1600" dirty="0" err="1">
+                <a:solidFill>
+                  <a:srgbClr val="000000"/>
+                </a:solidFill>
+                <a:effectLst/>
+                <a:latin typeface="Arial" panose="020B0604020202020204" pitchFamily="34" charset="0"/>
+                <a:ea typeface="Arial" panose="020B0604020202020204" pitchFamily="34" charset="0"/>
+              </a:rPr>
+              <a:t>WorkBench</a:t>
+            </a:r>
+            <a:r>
+              <a:rPr lang="es-ES" sz="1600" dirty="0">
+                <a:solidFill>
+                  <a:srgbClr val="000000"/>
+                </a:solidFill>
+                <a:effectLst/>
+                <a:latin typeface="Arial" panose="020B0604020202020204" pitchFamily="34" charset="0"/>
+                <a:ea typeface="Arial" panose="020B0604020202020204" pitchFamily="34" charset="0"/>
+              </a:rPr>
+              <a:t>, o algún otro gestor como </a:t>
+            </a:r>
+            <a:r>
+              <a:rPr lang="es-ES" sz="1600" dirty="0" err="1">
+                <a:solidFill>
+                  <a:srgbClr val="000000"/>
+                </a:solidFill>
+                <a:effectLst/>
+                <a:latin typeface="Arial" panose="020B0604020202020204" pitchFamily="34" charset="0"/>
+                <a:ea typeface="Arial" panose="020B0604020202020204" pitchFamily="34" charset="0"/>
+              </a:rPr>
+              <a:t>Laragon</a:t>
+            </a:r>
+            <a:r>
+              <a:rPr lang="es-ES" sz="1600" dirty="0">
+                <a:solidFill>
+                  <a:srgbClr val="000000"/>
+                </a:solidFill>
+                <a:effectLst/>
+                <a:latin typeface="Arial" panose="020B0604020202020204" pitchFamily="34" charset="0"/>
+                <a:ea typeface="Arial" panose="020B0604020202020204" pitchFamily="34" charset="0"/>
+              </a:rPr>
+              <a:t> o XAMPP, para lanzar la base de datos.</a:t>
+            </a:r>
+            <a:endParaRPr lang="es-CO" sz="1600" dirty="0">
+              <a:effectLst/>
+              <a:latin typeface="Calibri" panose="020F0502020204030204" pitchFamily="34" charset="0"/>
+              <a:ea typeface="Calibri" panose="020F0502020204030204" pitchFamily="34" charset="0"/>
+            </a:endParaRPr>
+          </a:p>
+          <a:p>
+            <a:pPr marL="342900" lvl="0" indent="-342900">
+              <a:lnSpc>
+                <a:spcPct val="150000"/>
+              </a:lnSpc>
+              <a:buFont typeface="Symbol" panose="05050102010706020507" pitchFamily="18" charset="2"/>
+              <a:buChar char=""/>
             </a:pPr>
             <a:r>
-              <a:rPr lang="es-ES" sz="2000" dirty="0"/>
-              <a:t>Las operaciones CRUD deben estar modularizadas.</a:t>
-            </a:r>
-          </a:p>
-          <a:p>
-            <a:pPr marL="285750" indent="-285750">
-              <a:buFont typeface="Arial" panose="020B0604020202020204" pitchFamily="34" charset="0"/>
-              <a:buChar char="•"/>
+              <a:rPr lang="es-ES" sz="1600" dirty="0">
+                <a:solidFill>
+                  <a:srgbClr val="000000"/>
+                </a:solidFill>
+                <a:effectLst/>
+                <a:latin typeface="Arial" panose="020B0604020202020204" pitchFamily="34" charset="0"/>
+                <a:ea typeface="Arial" panose="020B0604020202020204" pitchFamily="34" charset="0"/>
+              </a:rPr>
+              <a:t>Tener instalado el JDK 22 para lanzar tanto el aplicativo de escritorio.</a:t>
+            </a:r>
+            <a:endParaRPr lang="es-CO" sz="1600" dirty="0">
+              <a:effectLst/>
+              <a:latin typeface="Calibri" panose="020F0502020204030204" pitchFamily="34" charset="0"/>
+              <a:ea typeface="Calibri" panose="020F0502020204030204" pitchFamily="34" charset="0"/>
+            </a:endParaRPr>
+          </a:p>
+          <a:p>
+            <a:pPr marL="342900" lvl="0" indent="-342900">
+              <a:lnSpc>
+                <a:spcPct val="150000"/>
+              </a:lnSpc>
+              <a:buFont typeface="Symbol" panose="05050102010706020507" pitchFamily="18" charset="2"/>
+              <a:buChar char=""/>
             </a:pPr>
-            <a:endParaRPr lang="es-ES" sz="2000" dirty="0">
-              <a:latin typeface="Work Sans Light Roman" pitchFamily="2" charset="77"/>
+            <a:r>
+              <a:rPr lang="es-ES" sz="1600" dirty="0">
+                <a:solidFill>
+                  <a:srgbClr val="000000"/>
+                </a:solidFill>
+                <a:effectLst/>
+                <a:latin typeface="Arial" panose="020B0604020202020204" pitchFamily="34" charset="0"/>
+                <a:ea typeface="Arial" panose="020B0604020202020204" pitchFamily="34" charset="0"/>
+              </a:rPr>
+              <a:t>Librería </a:t>
+            </a:r>
+            <a:r>
+              <a:rPr lang="es-ES" sz="1600" dirty="0" err="1">
+                <a:solidFill>
+                  <a:srgbClr val="000000"/>
+                </a:solidFill>
+                <a:effectLst/>
+                <a:latin typeface="Arial" panose="020B0604020202020204" pitchFamily="34" charset="0"/>
+                <a:ea typeface="Arial" panose="020B0604020202020204" pitchFamily="34" charset="0"/>
+              </a:rPr>
+              <a:t>AbsoluteLayout</a:t>
+            </a:r>
+            <a:r>
+              <a:rPr lang="es-ES" sz="1600" dirty="0">
+                <a:solidFill>
+                  <a:srgbClr val="000000"/>
+                </a:solidFill>
+                <a:effectLst/>
+                <a:latin typeface="Arial" panose="020B0604020202020204" pitchFamily="34" charset="0"/>
+                <a:ea typeface="Arial" panose="020B0604020202020204" pitchFamily="34" charset="0"/>
+              </a:rPr>
+              <a:t> y My-sql-connector-java.8.0.18 para el correcto funcionamiento.</a:t>
+            </a:r>
+            <a:endParaRPr lang="es-CO" sz="1600" dirty="0">
+              <a:effectLst/>
+              <a:latin typeface="Calibri" panose="020F0502020204030204" pitchFamily="34" charset="0"/>
+              <a:ea typeface="Calibri" panose="020F0502020204030204" pitchFamily="34" charset="0"/>
             </a:endParaRPr>
           </a:p>
           <a:p>
-            <a:pPr marL="285750" indent="-285750">
-              <a:buFont typeface="Arial" panose="020B0604020202020204" pitchFamily="34" charset="0"/>
-              <a:buChar char="•"/>
+            <a:pPr marL="342900" lvl="0" indent="-342900">
+              <a:lnSpc>
+                <a:spcPct val="150000"/>
+              </a:lnSpc>
+              <a:buFont typeface="Symbol" panose="05050102010706020507" pitchFamily="18" charset="2"/>
+              <a:buChar char=""/>
             </a:pPr>
             <a:r>
-              <a:rPr lang="es-ES" sz="2000" dirty="0">
-                <a:latin typeface="Work Sans Light Roman" pitchFamily="2" charset="77"/>
+              <a:rPr lang="es-ES" sz="1600" dirty="0">
+                <a:solidFill>
+                  <a:srgbClr val="000000"/>
+                </a:solidFill>
+                <a:effectLst/>
+                <a:latin typeface="Arial" panose="020B0604020202020204" pitchFamily="34" charset="0"/>
+                <a:ea typeface="Arial" panose="020B0604020202020204" pitchFamily="34" charset="0"/>
               </a:rPr>
-              <a:t>Capacitación necesaria para la buena usabilidad del software.</a:t>
-            </a:r>
+              <a:t>Una computadora con un procesador de mínimo 2.6hz, 8 de RAM a 1600hz mínimo.</a:t>
+            </a:r>
+            <a:endParaRPr lang="es-CO" sz="1600" dirty="0">
+              <a:effectLst/>
+              <a:latin typeface="Calibri" panose="020F0502020204030204" pitchFamily="34" charset="0"/>
+              <a:ea typeface="Calibri" panose="020F0502020204030204" pitchFamily="34" charset="0"/>
+            </a:endParaRPr>
+          </a:p>
+          <a:p>
+            <a:pPr marL="342900" lvl="0" indent="-342900">
+              <a:lnSpc>
+                <a:spcPct val="150000"/>
+              </a:lnSpc>
+              <a:spcAft>
+                <a:spcPts val="800"/>
+              </a:spcAft>
+              <a:buFont typeface="Symbol" panose="05050102010706020507" pitchFamily="18" charset="2"/>
+              <a:buChar char=""/>
+            </a:pPr>
+            <a:r>
+              <a:rPr lang="es-ES" sz="1600" dirty="0">
+                <a:solidFill>
+                  <a:srgbClr val="000000"/>
+                </a:solidFill>
+                <a:effectLst/>
+                <a:latin typeface="Arial" panose="020B0604020202020204" pitchFamily="34" charset="0"/>
+                <a:ea typeface="Arial" panose="020B0604020202020204" pitchFamily="34" charset="0"/>
+              </a:rPr>
+              <a:t>Capacitación necesaria para la buena usabilidad del software</a:t>
+            </a:r>
+            <a:endParaRPr lang="es-CO" sz="1600" dirty="0">
+              <a:effectLst/>
+              <a:latin typeface="Calibri" panose="020F0502020204030204" pitchFamily="34" charset="0"/>
+              <a:ea typeface="Calibri" panose="020F0502020204030204" pitchFamily="34" charset="0"/>
+            </a:endParaRPr>
           </a:p>
           <a:p>
             <a:pPr marL="285750" indent="-285750">
@@ -5461,7 +5249,7 @@
 </p:sld>
 </file>
 
-<file path=ppt/slides/slide16.xml><?xml version="1.0" encoding="utf-8"?>
+<file path=ppt/slides/slide13.xml><?xml version="1.0" encoding="utf-8"?>
 <p:sld xmlns:a="http://schemas.openxmlformats.org/drawingml/2006/main" xmlns:r="http://schemas.openxmlformats.org/officeDocument/2006/relationships" xmlns:p="http://schemas.openxmlformats.org/presentationml/2006/main">
   <p:cSld>
     <p:spTree>
@@ -5603,7 +5391,7 @@
 </p:sld>
 </file>
 
-<file path=ppt/slides/slide17.xml><?xml version="1.0" encoding="utf-8"?>
+<file path=ppt/slides/slide14.xml><?xml version="1.0" encoding="utf-8"?>
 <p:sld xmlns:a="http://schemas.openxmlformats.org/drawingml/2006/main" xmlns:r="http://schemas.openxmlformats.org/officeDocument/2006/relationships" xmlns:p="http://schemas.openxmlformats.org/presentationml/2006/main">
   <p:cSld>
     <p:spTree>
@@ -5738,7 +5526,7 @@
 </p:sld>
 </file>
 
-<file path=ppt/slides/slide18.xml><?xml version="1.0" encoding="utf-8"?>
+<file path=ppt/slides/slide15.xml><?xml version="1.0" encoding="utf-8"?>
 <p:sld xmlns:a="http://schemas.openxmlformats.org/drawingml/2006/main" xmlns:r="http://schemas.openxmlformats.org/officeDocument/2006/relationships" xmlns:p="http://schemas.openxmlformats.org/presentationml/2006/main">
   <p:cSld>
     <p:bg>
@@ -5900,7 +5688,7 @@
 </p:sld>
 </file>
 
-<file path=ppt/slides/slide19.xml><?xml version="1.0" encoding="utf-8"?>
+<file path=ppt/slides/slide16.xml><?xml version="1.0" encoding="utf-8"?>
 <p:sld xmlns:a="http://schemas.openxmlformats.org/drawingml/2006/main" xmlns:r="http://schemas.openxmlformats.org/officeDocument/2006/relationships" xmlns:p="http://schemas.openxmlformats.org/presentationml/2006/main">
   <p:cSld>
     <p:spTree>
@@ -6198,6 +5986,50 @@
     <p:extLst>
       <p:ext uri="{BB962C8B-B14F-4D97-AF65-F5344CB8AC3E}">
         <p14:creationId xmlns:p14="http://schemas.microsoft.com/office/powerpoint/2010/main" val="1095845169"/>
+      </p:ext>
+    </p:extLst>
+  </p:cSld>
+  <p:clrMapOvr>
+    <a:masterClrMapping/>
+  </p:clrMapOvr>
+</p:sld>
+</file>
+
+<file path=ppt/slides/slide17.xml><?xml version="1.0" encoding="utf-8"?>
+<p:sld xmlns:a="http://schemas.openxmlformats.org/drawingml/2006/main" xmlns:r="http://schemas.openxmlformats.org/officeDocument/2006/relationships" xmlns:p="http://schemas.openxmlformats.org/presentationml/2006/main">
+  <p:cSld>
+    <p:bg>
+      <p:bgPr>
+        <a:blipFill dpi="0" rotWithShape="1">
+          <a:blip r:embed="rId2">
+            <a:lum/>
+          </a:blip>
+          <a:srcRect/>
+          <a:stretch>
+            <a:fillRect/>
+          </a:stretch>
+        </a:blipFill>
+        <a:effectLst/>
+      </p:bgPr>
+    </p:bg>
+    <p:spTree>
+      <p:nvGrpSpPr>
+        <p:cNvPr id="1" name=""/>
+        <p:cNvGrpSpPr/>
+        <p:nvPr/>
+      </p:nvGrpSpPr>
+      <p:grpSpPr>
+        <a:xfrm>
+          <a:off x="0" y="0"/>
+          <a:ext cx="0" cy="0"/>
+          <a:chOff x="0" y="0"/>
+          <a:chExt cx="0" cy="0"/>
+        </a:xfrm>
+      </p:grpSpPr>
+    </p:spTree>
+    <p:extLst>
+      <p:ext uri="{BB962C8B-B14F-4D97-AF65-F5344CB8AC3E}">
+        <p14:creationId xmlns:p14="http://schemas.microsoft.com/office/powerpoint/2010/main" val="2604626685"/>
       </p:ext>
     </p:extLst>
   </p:cSld>
@@ -6355,50 +6187,6 @@
 </p:sld>
 </file>
 
-<file path=ppt/slides/slide20.xml><?xml version="1.0" encoding="utf-8"?>
-<p:sld xmlns:a="http://schemas.openxmlformats.org/drawingml/2006/main" xmlns:r="http://schemas.openxmlformats.org/officeDocument/2006/relationships" xmlns:p="http://schemas.openxmlformats.org/presentationml/2006/main">
-  <p:cSld>
-    <p:bg>
-      <p:bgPr>
-        <a:blipFill dpi="0" rotWithShape="1">
-          <a:blip r:embed="rId2">
-            <a:lum/>
-          </a:blip>
-          <a:srcRect/>
-          <a:stretch>
-            <a:fillRect/>
-          </a:stretch>
-        </a:blipFill>
-        <a:effectLst/>
-      </p:bgPr>
-    </p:bg>
-    <p:spTree>
-      <p:nvGrpSpPr>
-        <p:cNvPr id="1" name=""/>
-        <p:cNvGrpSpPr/>
-        <p:nvPr/>
-      </p:nvGrpSpPr>
-      <p:grpSpPr>
-        <a:xfrm>
-          <a:off x="0" y="0"/>
-          <a:ext cx="0" cy="0"/>
-          <a:chOff x="0" y="0"/>
-          <a:chExt cx="0" cy="0"/>
-        </a:xfrm>
-      </p:grpSpPr>
-    </p:spTree>
-    <p:extLst>
-      <p:ext uri="{BB962C8B-B14F-4D97-AF65-F5344CB8AC3E}">
-        <p14:creationId xmlns:p14="http://schemas.microsoft.com/office/powerpoint/2010/main" val="2604626685"/>
-      </p:ext>
-    </p:extLst>
-  </p:cSld>
-  <p:clrMapOvr>
-    <a:masterClrMapping/>
-  </p:clrMapOvr>
-</p:sld>
-</file>
-
 <file path=ppt/slides/slide3.xml><?xml version="1.0" encoding="utf-8"?>
 <p:sld xmlns:a="http://schemas.openxmlformats.org/drawingml/2006/main" xmlns:r="http://schemas.openxmlformats.org/officeDocument/2006/relationships" xmlns:p="http://schemas.openxmlformats.org/presentationml/2006/main">
   <p:cSld>
@@ -6521,7 +6309,7 @@
           <a:p>
             <a:r>
               <a:rPr lang="es-ES" sz="1600" dirty="0"/>
-              <a:t>Actualmente, los entusiastas del fitness se enfrentan a varios desafíos al intentar gestionar su progreso y mantenerse motivados en su viaje de fitness. Entre estos</a:t>
+              <a:t>	Actualmente, los entusiastas del fitness se enfrentan a varios desafíos al intentar gestionar su progreso y mantenerse motivados en su viaje de fitness. Entre estos</a:t>
             </a:r>
           </a:p>
           <a:p>
@@ -6666,7 +6454,7 @@
         <p:spPr>
           <a:xfrm>
             <a:off x="577563" y="1423906"/>
-            <a:ext cx="5518437" cy="1569660"/>
+            <a:ext cx="11075721" cy="1958165"/>
           </a:xfrm>
           <a:prstGeom prst="rect">
             <a:avLst/>
@@ -6679,12 +6467,70 @@
           </a:bodyPr>
           <a:lstStyle/>
           <a:p>
-            <a:r>
-              <a:rPr lang="es-ES" sz="1600" dirty="0">
-                <a:latin typeface="Work Sans Light Roman" pitchFamily="2" charset="77"/>
+            <a:pPr indent="457200" algn="just">
+              <a:lnSpc>
+                <a:spcPct val="107000"/>
+              </a:lnSpc>
+              <a:spcAft>
+                <a:spcPts val="800"/>
+              </a:spcAft>
+            </a:pPr>
+            <a:r>
+              <a:rPr lang="es-CO" sz="1800" dirty="0">
+                <a:solidFill>
+                  <a:srgbClr val="000000"/>
+                </a:solidFill>
+                <a:effectLst/>
+                <a:latin typeface="Arial" panose="020B0604020202020204" pitchFamily="34" charset="0"/>
+                <a:ea typeface="Arial" panose="020B0604020202020204" pitchFamily="34" charset="0"/>
               </a:rPr>
-              <a:t>Una pagina web que permite ingresar a cualquier persona desde un navegador, creando una cuenta que permite llevar un control de comidas, entrenamientos y objetivos de cada usuario. También un software que permite administrar la base de datos que esta conectada a la pagina web para poder administrar planes, rutinas, circuitos, ejercicios y usuarios.</a:t>
-            </a:r>
+              <a:t>Con el propósito de optimizar los procesos de control de planes y usuarios de la página web </a:t>
+            </a:r>
+            <a:r>
+              <a:rPr lang="es-CO" sz="1800" dirty="0" err="1">
+                <a:effectLst/>
+                <a:latin typeface="Arial" panose="020B0604020202020204" pitchFamily="34" charset="0"/>
+                <a:ea typeface="Arial" panose="020B0604020202020204" pitchFamily="34" charset="0"/>
+              </a:rPr>
+              <a:t>GigaGains</a:t>
+            </a:r>
+            <a:r>
+              <a:rPr lang="es-CO" sz="1800" dirty="0">
+                <a:solidFill>
+                  <a:srgbClr val="000000"/>
+                </a:solidFill>
+                <a:effectLst/>
+                <a:latin typeface="Arial" panose="020B0604020202020204" pitchFamily="34" charset="0"/>
+                <a:ea typeface="Arial" panose="020B0604020202020204" pitchFamily="34" charset="0"/>
+              </a:rPr>
+              <a:t> del aprendiz, se propone la implementación de un sistema de administración para el manejar el control de estos. Esta solución busca proporcionando una herramienta eficiente para administradores que se encarguen del manejo de planes y usuarios de la página web.  </a:t>
+            </a:r>
+          </a:p>
+          <a:p>
+            <a:pPr indent="457200" algn="just">
+              <a:lnSpc>
+                <a:spcPct val="107000"/>
+              </a:lnSpc>
+              <a:spcAft>
+                <a:spcPts val="800"/>
+              </a:spcAft>
+            </a:pPr>
+            <a:r>
+              <a:rPr lang="es-CO" sz="1800" dirty="0">
+                <a:solidFill>
+                  <a:srgbClr val="000000"/>
+                </a:solidFill>
+                <a:effectLst/>
+                <a:latin typeface="Arial" panose="020B0604020202020204" pitchFamily="34" charset="0"/>
+                <a:ea typeface="Arial" panose="020B0604020202020204" pitchFamily="34" charset="0"/>
+              </a:rPr>
+              <a:t>En este informe detallamos los objetivos, alcances y metodologías para la implementación de este sistema de administración para el control de planes y usuarios. </a:t>
+            </a:r>
+            <a:endParaRPr lang="es-CO" sz="1800" dirty="0">
+              <a:effectLst/>
+              <a:latin typeface="Calibri" panose="020F0502020204030204" pitchFamily="34" charset="0"/>
+              <a:ea typeface="Calibri" panose="020F0502020204030204" pitchFamily="34" charset="0"/>
+            </a:endParaRPr>
           </a:p>
         </p:txBody>
       </p:sp>
@@ -6702,6 +6548,681 @@
 </file>
 
 <file path=ppt/slides/slide5.xml><?xml version="1.0" encoding="utf-8"?>
+<p:sld xmlns:a="http://schemas.openxmlformats.org/drawingml/2006/main" xmlns:r="http://schemas.openxmlformats.org/officeDocument/2006/relationships" xmlns:p="http://schemas.openxmlformats.org/presentationml/2006/main">
+  <p:cSld>
+    <p:spTree>
+      <p:nvGrpSpPr>
+        <p:cNvPr id="1" name="">
+          <a:extLst>
+            <a:ext uri="{FF2B5EF4-FFF2-40B4-BE49-F238E27FC236}">
+              <a16:creationId xmlns:a16="http://schemas.microsoft.com/office/drawing/2014/main" id="{037C88A9-9F68-F3B1-A80C-079466F95A9C}"/>
+            </a:ext>
+          </a:extLst>
+        </p:cNvPr>
+        <p:cNvGrpSpPr/>
+        <p:nvPr/>
+      </p:nvGrpSpPr>
+      <p:grpSpPr>
+        <a:xfrm>
+          <a:off x="0" y="0"/>
+          <a:ext cx="0" cy="0"/>
+          <a:chOff x="0" y="0"/>
+          <a:chExt cx="0" cy="0"/>
+        </a:xfrm>
+      </p:grpSpPr>
+      <p:sp>
+        <p:nvSpPr>
+          <p:cNvPr id="2" name="Título 1">
+            <a:extLst>
+              <a:ext uri="{FF2B5EF4-FFF2-40B4-BE49-F238E27FC236}">
+                <a16:creationId xmlns:a16="http://schemas.microsoft.com/office/drawing/2014/main" id="{1CFFE958-2A19-BC65-7211-4D1DE7DF0617}"/>
+              </a:ext>
+            </a:extLst>
+          </p:cNvPr>
+          <p:cNvSpPr txBox="1">
+            <a:spLocks/>
+          </p:cNvSpPr>
+          <p:nvPr/>
+        </p:nvSpPr>
+        <p:spPr>
+          <a:xfrm>
+            <a:off x="456236" y="416689"/>
+            <a:ext cx="9815809" cy="741563"/>
+          </a:xfrm>
+          <a:prstGeom prst="rect">
+            <a:avLst/>
+          </a:prstGeom>
+          <a:ln>
+            <a:noFill/>
+          </a:ln>
+        </p:spPr>
+        <p:txBody>
+          <a:bodyPr/>
+          <a:lstStyle>
+            <a:lvl1pPr algn="l" defTabSz="914400" rtl="0" eaLnBrk="1" latinLnBrk="0" hangingPunct="1">
+              <a:lnSpc>
+                <a:spcPct val="90000"/>
+              </a:lnSpc>
+              <a:spcBef>
+                <a:spcPct val="0"/>
+              </a:spcBef>
+              <a:buNone/>
+              <a:defRPr sz="4400" kern="1200">
+                <a:solidFill>
+                  <a:schemeClr val="tx1"/>
+                </a:solidFill>
+                <a:latin typeface="+mj-lt"/>
+                <a:ea typeface="+mj-ea"/>
+                <a:cs typeface="+mj-cs"/>
+              </a:defRPr>
+            </a:lvl1pPr>
+          </a:lstStyle>
+          <a:p>
+            <a:pPr lvl="0">
+              <a:defRPr/>
+            </a:pPr>
+            <a:r>
+              <a:rPr lang="es-CO" sz="3600" b="1" dirty="0">
+                <a:solidFill>
+                  <a:srgbClr val="4D4D4C"/>
+                </a:solidFill>
+                <a:latin typeface="WORK SANS BOLD ROMAN" pitchFamily="2" charset="77"/>
+              </a:rPr>
+              <a:t>Objetivo General</a:t>
+            </a:r>
+          </a:p>
+        </p:txBody>
+      </p:sp>
+      <p:sp>
+        <p:nvSpPr>
+          <p:cNvPr id="3" name="CuadroTexto 2">
+            <a:extLst>
+              <a:ext uri="{FF2B5EF4-FFF2-40B4-BE49-F238E27FC236}">
+                <a16:creationId xmlns:a16="http://schemas.microsoft.com/office/drawing/2014/main" id="{67783F64-98C4-7486-7E82-F7E1812C8C73}"/>
+              </a:ext>
+            </a:extLst>
+          </p:cNvPr>
+          <p:cNvSpPr txBox="1"/>
+          <p:nvPr/>
+        </p:nvSpPr>
+        <p:spPr>
+          <a:xfrm>
+            <a:off x="577563" y="1423906"/>
+            <a:ext cx="11075721" cy="670120"/>
+          </a:xfrm>
+          <a:prstGeom prst="rect">
+            <a:avLst/>
+          </a:prstGeom>
+          <a:noFill/>
+        </p:spPr>
+        <p:txBody>
+          <a:bodyPr wrap="square" rtlCol="0">
+            <a:spAutoFit/>
+          </a:bodyPr>
+          <a:lstStyle/>
+          <a:p>
+            <a:pPr indent="457200" algn="just">
+              <a:lnSpc>
+                <a:spcPct val="107000"/>
+              </a:lnSpc>
+              <a:spcAft>
+                <a:spcPts val="800"/>
+              </a:spcAft>
+            </a:pPr>
+            <a:r>
+              <a:rPr lang="es-CO" sz="1800" dirty="0">
+                <a:solidFill>
+                  <a:srgbClr val="000000"/>
+                </a:solidFill>
+                <a:effectLst/>
+                <a:latin typeface="Arial" panose="020B0604020202020204" pitchFamily="34" charset="0"/>
+                <a:ea typeface="Arial" panose="020B0604020202020204" pitchFamily="34" charset="0"/>
+              </a:rPr>
+              <a:t>Desarrollar un sistema de administración para el control de planes y usuarios de la página web </a:t>
+            </a:r>
+            <a:r>
+              <a:rPr lang="es-CO" sz="1800" dirty="0" err="1">
+                <a:solidFill>
+                  <a:srgbClr val="000000"/>
+                </a:solidFill>
+                <a:effectLst/>
+                <a:latin typeface="Arial" panose="020B0604020202020204" pitchFamily="34" charset="0"/>
+                <a:ea typeface="Arial" panose="020B0604020202020204" pitchFamily="34" charset="0"/>
+              </a:rPr>
+              <a:t>GigaGains</a:t>
+            </a:r>
+            <a:r>
+              <a:rPr lang="es-CO" sz="1800" dirty="0">
+                <a:solidFill>
+                  <a:srgbClr val="000000"/>
+                </a:solidFill>
+                <a:effectLst/>
+                <a:latin typeface="Arial" panose="020B0604020202020204" pitchFamily="34" charset="0"/>
+                <a:ea typeface="Arial" panose="020B0604020202020204" pitchFamily="34" charset="0"/>
+              </a:rPr>
+              <a:t>.  </a:t>
+            </a:r>
+            <a:endParaRPr lang="es-CO" sz="1800" dirty="0">
+              <a:effectLst/>
+              <a:latin typeface="Calibri" panose="020F0502020204030204" pitchFamily="34" charset="0"/>
+              <a:ea typeface="Calibri" panose="020F0502020204030204" pitchFamily="34" charset="0"/>
+            </a:endParaRPr>
+          </a:p>
+        </p:txBody>
+      </p:sp>
+    </p:spTree>
+    <p:extLst>
+      <p:ext uri="{BB962C8B-B14F-4D97-AF65-F5344CB8AC3E}">
+        <p14:creationId xmlns:p14="http://schemas.microsoft.com/office/powerpoint/2010/main" val="2811689420"/>
+      </p:ext>
+    </p:extLst>
+  </p:cSld>
+  <p:clrMapOvr>
+    <a:masterClrMapping/>
+  </p:clrMapOvr>
+</p:sld>
+</file>
+
+<file path=ppt/slides/slide6.xml><?xml version="1.0" encoding="utf-8"?>
+<p:sld xmlns:a="http://schemas.openxmlformats.org/drawingml/2006/main" xmlns:r="http://schemas.openxmlformats.org/officeDocument/2006/relationships" xmlns:p="http://schemas.openxmlformats.org/presentationml/2006/main">
+  <p:cSld>
+    <p:spTree>
+      <p:nvGrpSpPr>
+        <p:cNvPr id="1" name="">
+          <a:extLst>
+            <a:ext uri="{FF2B5EF4-FFF2-40B4-BE49-F238E27FC236}">
+              <a16:creationId xmlns:a16="http://schemas.microsoft.com/office/drawing/2014/main" id="{7F7F4F2E-1317-13B9-AFCE-08FC0925454A}"/>
+            </a:ext>
+          </a:extLst>
+        </p:cNvPr>
+        <p:cNvGrpSpPr/>
+        <p:nvPr/>
+      </p:nvGrpSpPr>
+      <p:grpSpPr>
+        <a:xfrm>
+          <a:off x="0" y="0"/>
+          <a:ext cx="0" cy="0"/>
+          <a:chOff x="0" y="0"/>
+          <a:chExt cx="0" cy="0"/>
+        </a:xfrm>
+      </p:grpSpPr>
+      <p:sp>
+        <p:nvSpPr>
+          <p:cNvPr id="2" name="Título 1">
+            <a:extLst>
+              <a:ext uri="{FF2B5EF4-FFF2-40B4-BE49-F238E27FC236}">
+                <a16:creationId xmlns:a16="http://schemas.microsoft.com/office/drawing/2014/main" id="{12A5F470-BF07-914D-ED42-DF4CF5D7D6A1}"/>
+              </a:ext>
+            </a:extLst>
+          </p:cNvPr>
+          <p:cNvSpPr txBox="1">
+            <a:spLocks/>
+          </p:cNvSpPr>
+          <p:nvPr/>
+        </p:nvSpPr>
+        <p:spPr>
+          <a:xfrm>
+            <a:off x="456236" y="416689"/>
+            <a:ext cx="9815809" cy="741563"/>
+          </a:xfrm>
+          <a:prstGeom prst="rect">
+            <a:avLst/>
+          </a:prstGeom>
+          <a:ln>
+            <a:noFill/>
+          </a:ln>
+        </p:spPr>
+        <p:txBody>
+          <a:bodyPr/>
+          <a:lstStyle>
+            <a:lvl1pPr algn="l" defTabSz="914400" rtl="0" eaLnBrk="1" latinLnBrk="0" hangingPunct="1">
+              <a:lnSpc>
+                <a:spcPct val="90000"/>
+              </a:lnSpc>
+              <a:spcBef>
+                <a:spcPct val="0"/>
+              </a:spcBef>
+              <a:buNone/>
+              <a:defRPr sz="4400" kern="1200">
+                <a:solidFill>
+                  <a:schemeClr val="tx1"/>
+                </a:solidFill>
+                <a:latin typeface="+mj-lt"/>
+                <a:ea typeface="+mj-ea"/>
+                <a:cs typeface="+mj-cs"/>
+              </a:defRPr>
+            </a:lvl1pPr>
+          </a:lstStyle>
+          <a:p>
+            <a:pPr lvl="0">
+              <a:defRPr/>
+            </a:pPr>
+            <a:r>
+              <a:rPr lang="es-CO" sz="3600" b="1" dirty="0">
+                <a:solidFill>
+                  <a:srgbClr val="4D4D4C"/>
+                </a:solidFill>
+                <a:latin typeface="WORK SANS BOLD ROMAN" pitchFamily="2" charset="77"/>
+              </a:rPr>
+              <a:t>Objetivos Específicos</a:t>
+            </a:r>
+          </a:p>
+        </p:txBody>
+      </p:sp>
+      <p:sp>
+        <p:nvSpPr>
+          <p:cNvPr id="3" name="CuadroTexto 2">
+            <a:extLst>
+              <a:ext uri="{FF2B5EF4-FFF2-40B4-BE49-F238E27FC236}">
+                <a16:creationId xmlns:a16="http://schemas.microsoft.com/office/drawing/2014/main" id="{EA66239A-FDD3-CD55-660C-7E1C9CF591AA}"/>
+              </a:ext>
+            </a:extLst>
+          </p:cNvPr>
+          <p:cNvSpPr txBox="1"/>
+          <p:nvPr/>
+        </p:nvSpPr>
+        <p:spPr>
+          <a:xfrm>
+            <a:off x="577563" y="1423906"/>
+            <a:ext cx="11235209" cy="5012654"/>
+          </a:xfrm>
+          <a:prstGeom prst="rect">
+            <a:avLst/>
+          </a:prstGeom>
+          <a:noFill/>
+        </p:spPr>
+        <p:txBody>
+          <a:bodyPr wrap="square" rtlCol="0">
+            <a:spAutoFit/>
+          </a:bodyPr>
+          <a:lstStyle/>
+          <a:p>
+            <a:pPr marL="342900" lvl="0" indent="-342900" algn="just">
+              <a:lnSpc>
+                <a:spcPct val="107000"/>
+              </a:lnSpc>
+              <a:spcAft>
+                <a:spcPts val="800"/>
+              </a:spcAft>
+              <a:buFont typeface="Arial" panose="020B0604020202020204" pitchFamily="34" charset="0"/>
+              <a:buChar char="●"/>
+            </a:pPr>
+            <a:r>
+              <a:rPr lang="es-CO" sz="1600" dirty="0">
+                <a:solidFill>
+                  <a:srgbClr val="000000"/>
+                </a:solidFill>
+                <a:effectLst/>
+                <a:latin typeface="Arial" panose="020B0604020202020204" pitchFamily="34" charset="0"/>
+                <a:ea typeface="Arial" panose="020B0604020202020204" pitchFamily="34" charset="0"/>
+                <a:cs typeface="Noto Sans Symbols"/>
+              </a:rPr>
+              <a:t>Desarrollar un aplicativo capaz de crear, editar, leer y borrar planes para la página web </a:t>
+            </a:r>
+            <a:r>
+              <a:rPr lang="es-CO" sz="1600" dirty="0" err="1">
+                <a:solidFill>
+                  <a:srgbClr val="000000"/>
+                </a:solidFill>
+                <a:effectLst/>
+                <a:latin typeface="Arial" panose="020B0604020202020204" pitchFamily="34" charset="0"/>
+                <a:ea typeface="Arial" panose="020B0604020202020204" pitchFamily="34" charset="0"/>
+                <a:cs typeface="Noto Sans Symbols"/>
+              </a:rPr>
+              <a:t>GigaGains</a:t>
+            </a:r>
+            <a:r>
+              <a:rPr lang="es-CO" sz="1600" dirty="0">
+                <a:solidFill>
+                  <a:srgbClr val="000000"/>
+                </a:solidFill>
+                <a:effectLst/>
+                <a:latin typeface="Arial" panose="020B0604020202020204" pitchFamily="34" charset="0"/>
+                <a:ea typeface="Arial" panose="020B0604020202020204" pitchFamily="34" charset="0"/>
+                <a:cs typeface="Noto Sans Symbols"/>
+              </a:rPr>
+              <a:t>.</a:t>
+            </a:r>
+            <a:endParaRPr lang="es-CO" sz="1600" dirty="0">
+              <a:effectLst/>
+              <a:latin typeface="Noto Sans Symbols"/>
+              <a:ea typeface="Noto Sans Symbols"/>
+              <a:cs typeface="Noto Sans Symbols"/>
+            </a:endParaRPr>
+          </a:p>
+          <a:p>
+            <a:pPr>
+              <a:lnSpc>
+                <a:spcPct val="107000"/>
+              </a:lnSpc>
+              <a:spcAft>
+                <a:spcPts val="800"/>
+              </a:spcAft>
+            </a:pPr>
+            <a:r>
+              <a:rPr lang="es-CO" sz="1600" dirty="0">
+                <a:effectLst/>
+                <a:latin typeface="Arial" panose="020B0604020202020204" pitchFamily="34" charset="0"/>
+                <a:ea typeface="Arial" panose="020B0604020202020204" pitchFamily="34" charset="0"/>
+              </a:rPr>
+              <a:t> </a:t>
+            </a:r>
+            <a:endParaRPr lang="es-CO" sz="1600" dirty="0">
+              <a:effectLst/>
+              <a:latin typeface="Calibri" panose="020F0502020204030204" pitchFamily="34" charset="0"/>
+              <a:ea typeface="Calibri" panose="020F0502020204030204" pitchFamily="34" charset="0"/>
+            </a:endParaRPr>
+          </a:p>
+          <a:p>
+            <a:pPr marL="342900" lvl="0" indent="-342900">
+              <a:lnSpc>
+                <a:spcPct val="107000"/>
+              </a:lnSpc>
+              <a:spcAft>
+                <a:spcPts val="800"/>
+              </a:spcAft>
+              <a:buFont typeface="Arial" panose="020B0604020202020204" pitchFamily="34" charset="0"/>
+              <a:buChar char="●"/>
+            </a:pPr>
+            <a:r>
+              <a:rPr lang="es-CO" sz="1600" dirty="0">
+                <a:effectLst/>
+                <a:latin typeface="Arial" panose="020B0604020202020204" pitchFamily="34" charset="0"/>
+                <a:ea typeface="Arial" panose="020B0604020202020204" pitchFamily="34" charset="0"/>
+                <a:cs typeface="Noto Sans Symbols"/>
+              </a:rPr>
+              <a:t>Integrar una base de datos que permita cargar y administrar los datos de los usuarios y planes. </a:t>
+            </a:r>
+            <a:endParaRPr lang="es-CO" sz="1600" dirty="0">
+              <a:effectLst/>
+              <a:latin typeface="Noto Sans Symbols"/>
+              <a:ea typeface="Noto Sans Symbols"/>
+              <a:cs typeface="Noto Sans Symbols"/>
+            </a:endParaRPr>
+          </a:p>
+          <a:p>
+            <a:pPr marL="457200">
+              <a:lnSpc>
+                <a:spcPct val="107000"/>
+              </a:lnSpc>
+            </a:pPr>
+            <a:r>
+              <a:rPr lang="es-CO" sz="1600" dirty="0">
+                <a:effectLst/>
+                <a:latin typeface="Arial" panose="020B0604020202020204" pitchFamily="34" charset="0"/>
+                <a:ea typeface="Arial" panose="020B0604020202020204" pitchFamily="34" charset="0"/>
+              </a:rPr>
+              <a:t> </a:t>
+            </a:r>
+            <a:endParaRPr lang="es-CO" sz="1600" dirty="0">
+              <a:effectLst/>
+              <a:latin typeface="Calibri" panose="020F0502020204030204" pitchFamily="34" charset="0"/>
+              <a:ea typeface="Calibri" panose="020F0502020204030204" pitchFamily="34" charset="0"/>
+            </a:endParaRPr>
+          </a:p>
+          <a:p>
+            <a:pPr marL="342900" lvl="0" indent="-342900">
+              <a:lnSpc>
+                <a:spcPct val="107000"/>
+              </a:lnSpc>
+              <a:spcAft>
+                <a:spcPts val="800"/>
+              </a:spcAft>
+              <a:buFont typeface="Symbol" panose="05050102010706020507" pitchFamily="18" charset="2"/>
+              <a:buChar char=""/>
+            </a:pPr>
+            <a:r>
+              <a:rPr lang="es-MX" sz="1600" dirty="0">
+                <a:effectLst/>
+                <a:latin typeface="Arial" panose="020B0604020202020204" pitchFamily="34" charset="0"/>
+                <a:ea typeface="Arial" panose="020B0604020202020204" pitchFamily="34" charset="0"/>
+              </a:rPr>
+              <a:t>Permitir la modificación y eliminación de usuarios.</a:t>
+            </a:r>
+            <a:endParaRPr lang="es-CO" sz="1600" dirty="0">
+              <a:effectLst/>
+              <a:latin typeface="Calibri" panose="020F0502020204030204" pitchFamily="34" charset="0"/>
+              <a:ea typeface="Calibri" panose="020F0502020204030204" pitchFamily="34" charset="0"/>
+            </a:endParaRPr>
+          </a:p>
+          <a:p>
+            <a:pPr>
+              <a:lnSpc>
+                <a:spcPct val="107000"/>
+              </a:lnSpc>
+              <a:spcAft>
+                <a:spcPts val="800"/>
+              </a:spcAft>
+            </a:pPr>
+            <a:r>
+              <a:rPr lang="es-MX" sz="1600" dirty="0">
+                <a:effectLst/>
+                <a:latin typeface="Arial" panose="020B0604020202020204" pitchFamily="34" charset="0"/>
+                <a:ea typeface="Arial" panose="020B0604020202020204" pitchFamily="34" charset="0"/>
+              </a:rPr>
+              <a:t> </a:t>
+            </a:r>
+            <a:endParaRPr lang="es-CO" sz="1600" dirty="0">
+              <a:effectLst/>
+              <a:latin typeface="Calibri" panose="020F0502020204030204" pitchFamily="34" charset="0"/>
+              <a:ea typeface="Calibri" panose="020F0502020204030204" pitchFamily="34" charset="0"/>
+            </a:endParaRPr>
+          </a:p>
+          <a:p>
+            <a:pPr marL="342900" lvl="0" indent="-342900">
+              <a:lnSpc>
+                <a:spcPct val="107000"/>
+              </a:lnSpc>
+              <a:spcAft>
+                <a:spcPts val="800"/>
+              </a:spcAft>
+              <a:buFont typeface="Symbol" panose="05050102010706020507" pitchFamily="18" charset="2"/>
+              <a:buChar char=""/>
+            </a:pPr>
+            <a:r>
+              <a:rPr lang="es-MX" sz="1600" dirty="0">
+                <a:effectLst/>
+                <a:latin typeface="Arial" panose="020B0604020202020204" pitchFamily="34" charset="0"/>
+                <a:ea typeface="Arial" panose="020B0604020202020204" pitchFamily="34" charset="0"/>
+              </a:rPr>
+              <a:t>Facilitar la gestión de datos como ejercicios, circuitos, rutinas y dietas.</a:t>
+            </a:r>
+            <a:endParaRPr lang="es-CO" sz="1600" dirty="0">
+              <a:effectLst/>
+              <a:latin typeface="Calibri" panose="020F0502020204030204" pitchFamily="34" charset="0"/>
+              <a:ea typeface="Calibri" panose="020F0502020204030204" pitchFamily="34" charset="0"/>
+            </a:endParaRPr>
+          </a:p>
+          <a:p>
+            <a:pPr>
+              <a:lnSpc>
+                <a:spcPct val="107000"/>
+              </a:lnSpc>
+              <a:spcAft>
+                <a:spcPts val="800"/>
+              </a:spcAft>
+            </a:pPr>
+            <a:r>
+              <a:rPr lang="es-MX" sz="1600" dirty="0">
+                <a:effectLst/>
+                <a:latin typeface="Arial" panose="020B0604020202020204" pitchFamily="34" charset="0"/>
+                <a:ea typeface="Arial" panose="020B0604020202020204" pitchFamily="34" charset="0"/>
+              </a:rPr>
+              <a:t> </a:t>
+            </a:r>
+            <a:endParaRPr lang="es-CO" sz="1600" dirty="0">
+              <a:effectLst/>
+              <a:latin typeface="Calibri" panose="020F0502020204030204" pitchFamily="34" charset="0"/>
+              <a:ea typeface="Calibri" panose="020F0502020204030204" pitchFamily="34" charset="0"/>
+            </a:endParaRPr>
+          </a:p>
+          <a:p>
+            <a:pPr marL="342900" lvl="0" indent="-342900">
+              <a:lnSpc>
+                <a:spcPct val="107000"/>
+              </a:lnSpc>
+              <a:buFont typeface="Symbol" panose="05050102010706020507" pitchFamily="18" charset="2"/>
+              <a:buChar char=""/>
+            </a:pPr>
+            <a:r>
+              <a:rPr lang="es-MX" sz="1600" dirty="0">
+                <a:effectLst/>
+                <a:latin typeface="Arial" panose="020B0604020202020204" pitchFamily="34" charset="0"/>
+                <a:ea typeface="Arial" panose="020B0604020202020204" pitchFamily="34" charset="0"/>
+              </a:rPr>
+              <a:t>Proteger el software con autenticación a los administradores con su correo y contraseña proporcionada por el Super Administrador.</a:t>
+            </a:r>
+            <a:endParaRPr lang="es-CO" sz="1600" dirty="0">
+              <a:effectLst/>
+              <a:latin typeface="Calibri" panose="020F0502020204030204" pitchFamily="34" charset="0"/>
+              <a:ea typeface="Calibri" panose="020F0502020204030204" pitchFamily="34" charset="0"/>
+            </a:endParaRPr>
+          </a:p>
+          <a:p>
+            <a:pPr marL="457200">
+              <a:lnSpc>
+                <a:spcPct val="107000"/>
+              </a:lnSpc>
+            </a:pPr>
+            <a:r>
+              <a:rPr lang="es-MX" sz="1600" dirty="0">
+                <a:effectLst/>
+                <a:latin typeface="Arial" panose="020B0604020202020204" pitchFamily="34" charset="0"/>
+                <a:ea typeface="Arial" panose="020B0604020202020204" pitchFamily="34" charset="0"/>
+              </a:rPr>
+              <a:t> </a:t>
+            </a:r>
+            <a:endParaRPr lang="es-CO" sz="1600" dirty="0">
+              <a:effectLst/>
+              <a:latin typeface="Calibri" panose="020F0502020204030204" pitchFamily="34" charset="0"/>
+              <a:ea typeface="Calibri" panose="020F0502020204030204" pitchFamily="34" charset="0"/>
+            </a:endParaRPr>
+          </a:p>
+          <a:p>
+            <a:pPr marL="342900" lvl="0" indent="-342900">
+              <a:lnSpc>
+                <a:spcPct val="107000"/>
+              </a:lnSpc>
+              <a:buFont typeface="Symbol" panose="05050102010706020507" pitchFamily="18" charset="2"/>
+              <a:buChar char=""/>
+            </a:pPr>
+            <a:r>
+              <a:rPr lang="es-MX" sz="1600" dirty="0">
+                <a:effectLst/>
+                <a:latin typeface="Arial" panose="020B0604020202020204" pitchFamily="34" charset="0"/>
+                <a:ea typeface="Arial" panose="020B0604020202020204" pitchFamily="34" charset="0"/>
+              </a:rPr>
+              <a:t>Diseñar una interfaz amigable y eficiente para los administradores que facilite el manejo de planes y usuarios.</a:t>
+            </a:r>
+            <a:endParaRPr lang="es-CO" sz="1600" dirty="0">
+              <a:effectLst/>
+              <a:latin typeface="Calibri" panose="020F0502020204030204" pitchFamily="34" charset="0"/>
+              <a:ea typeface="Calibri" panose="020F0502020204030204" pitchFamily="34" charset="0"/>
+            </a:endParaRPr>
+          </a:p>
+          <a:p>
+            <a:pPr marL="457200">
+              <a:lnSpc>
+                <a:spcPct val="107000"/>
+              </a:lnSpc>
+            </a:pPr>
+            <a:r>
+              <a:rPr lang="es-MX" sz="1600" dirty="0">
+                <a:effectLst/>
+                <a:latin typeface="Arial" panose="020B0604020202020204" pitchFamily="34" charset="0"/>
+                <a:ea typeface="Arial" panose="020B0604020202020204" pitchFamily="34" charset="0"/>
+              </a:rPr>
+              <a:t> </a:t>
+            </a:r>
+            <a:endParaRPr lang="es-CO" sz="1600" dirty="0">
+              <a:effectLst/>
+              <a:latin typeface="Calibri" panose="020F0502020204030204" pitchFamily="34" charset="0"/>
+              <a:ea typeface="Calibri" panose="020F0502020204030204" pitchFamily="34" charset="0"/>
+            </a:endParaRPr>
+          </a:p>
+          <a:p>
+            <a:pPr marL="342900" lvl="0" indent="-342900">
+              <a:lnSpc>
+                <a:spcPct val="107000"/>
+              </a:lnSpc>
+              <a:buFont typeface="Symbol" panose="05050102010706020507" pitchFamily="18" charset="2"/>
+              <a:buChar char=""/>
+            </a:pPr>
+            <a:r>
+              <a:rPr lang="es-MX" sz="1600" dirty="0">
+                <a:effectLst/>
+                <a:latin typeface="Arial" panose="020B0604020202020204" pitchFamily="34" charset="0"/>
+                <a:ea typeface="Arial" panose="020B0604020202020204" pitchFamily="34" charset="0"/>
+              </a:rPr>
+              <a:t>Permitir al Super Administrador la asignación de roles y permisos a los administradores.</a:t>
+            </a:r>
+            <a:endParaRPr lang="es-CO" sz="1600" dirty="0">
+              <a:effectLst/>
+              <a:latin typeface="Calibri" panose="020F0502020204030204" pitchFamily="34" charset="0"/>
+              <a:ea typeface="Calibri" panose="020F0502020204030204" pitchFamily="34" charset="0"/>
+            </a:endParaRPr>
+          </a:p>
+          <a:p>
+            <a:pPr marL="457200">
+              <a:lnSpc>
+                <a:spcPct val="107000"/>
+              </a:lnSpc>
+            </a:pPr>
+            <a:r>
+              <a:rPr lang="es-MX" sz="1600" dirty="0">
+                <a:effectLst/>
+                <a:latin typeface="Arial" panose="020B0604020202020204" pitchFamily="34" charset="0"/>
+                <a:ea typeface="Arial" panose="020B0604020202020204" pitchFamily="34" charset="0"/>
+              </a:rPr>
+              <a:t> </a:t>
+            </a:r>
+            <a:endParaRPr lang="es-CO" sz="1600" dirty="0">
+              <a:effectLst/>
+              <a:latin typeface="Calibri" panose="020F0502020204030204" pitchFamily="34" charset="0"/>
+              <a:ea typeface="Calibri" panose="020F0502020204030204" pitchFamily="34" charset="0"/>
+            </a:endParaRPr>
+          </a:p>
+          <a:p>
+            <a:pPr marL="342900" lvl="0" indent="-342900">
+              <a:lnSpc>
+                <a:spcPct val="107000"/>
+              </a:lnSpc>
+              <a:spcAft>
+                <a:spcPts val="800"/>
+              </a:spcAft>
+              <a:buFont typeface="Symbol" panose="05050102010706020507" pitchFamily="18" charset="2"/>
+              <a:buChar char=""/>
+            </a:pPr>
+            <a:r>
+              <a:rPr lang="es-MX" sz="1600" dirty="0">
+                <a:effectLst/>
+                <a:latin typeface="Arial" panose="020B0604020202020204" pitchFamily="34" charset="0"/>
+                <a:ea typeface="Arial" panose="020B0604020202020204" pitchFamily="34" charset="0"/>
+              </a:rPr>
+              <a:t>Permitir al Super Administrador el poder restablecer Ejercicios, Circuitos, Rutinas, Dietas, Planes y Usuarios.</a:t>
+            </a:r>
+            <a:endParaRPr lang="es-CO" sz="1600" dirty="0">
+              <a:effectLst/>
+              <a:latin typeface="Calibri" panose="020F0502020204030204" pitchFamily="34" charset="0"/>
+              <a:ea typeface="Calibri" panose="020F0502020204030204" pitchFamily="34" charset="0"/>
+            </a:endParaRPr>
+          </a:p>
+        </p:txBody>
+      </p:sp>
+    </p:spTree>
+    <p:extLst>
+      <p:ext uri="{BB962C8B-B14F-4D97-AF65-F5344CB8AC3E}">
+        <p14:creationId xmlns:p14="http://schemas.microsoft.com/office/powerpoint/2010/main" val="1887933673"/>
+      </p:ext>
+    </p:extLst>
+  </p:cSld>
+  <p:clrMapOvr>
+    <a:masterClrMapping/>
+  </p:clrMapOvr>
+</p:sld>
+</file>
+
+<file path=ppt/slides/slide7.xml><?xml version="1.0" encoding="utf-8"?>
 <p:sld xmlns:a="http://schemas.openxmlformats.org/drawingml/2006/main" xmlns:r="http://schemas.openxmlformats.org/officeDocument/2006/relationships" xmlns:p="http://schemas.openxmlformats.org/presentationml/2006/main">
   <p:cSld>
     <p:spTree>
@@ -6849,7 +7370,7 @@
 </p:sld>
 </file>
 
-<file path=ppt/slides/slide6.xml><?xml version="1.0" encoding="utf-8"?>
+<file path=ppt/slides/slide8.xml><?xml version="1.0" encoding="utf-8"?>
 <p:sld xmlns:a="http://schemas.openxmlformats.org/drawingml/2006/main" xmlns:r="http://schemas.openxmlformats.org/officeDocument/2006/relationships" xmlns:p="http://schemas.openxmlformats.org/presentationml/2006/main">
   <p:cSld>
     <p:spTree>
@@ -6880,8 +7401,8 @@
         </p:nvSpPr>
         <p:spPr>
           <a:xfrm>
-            <a:off x="577563" y="1423906"/>
-            <a:ext cx="5518437" cy="1569660"/>
+            <a:off x="396809" y="339385"/>
+            <a:ext cx="5518437" cy="5050293"/>
           </a:xfrm>
           <a:prstGeom prst="rect">
             <a:avLst/>
@@ -6895,17 +7416,20 @@
           <a:lstStyle/>
           <a:p>
             <a:r>
-              <a:rPr lang="es-CO" sz="1600" dirty="0">
-                <a:latin typeface="Work Sans Light Roman" pitchFamily="2" charset="77"/>
+              <a:rPr lang="es-CO" sz="1600" dirty="0"/>
+              <a:t>Para el desarrollo de este proyecto se utilizaron los siguientes</a:t>
+            </a:r>
+          </a:p>
+          <a:p>
+            <a:r>
+              <a:rPr lang="es-CO" sz="1600" b="1" dirty="0">
+                <a:effectLst/>
               </a:rPr>
-              <a:t>Para el desarrollo de este proyecto se utilizaron los siguientes</a:t>
-            </a:r>
+              <a:t>Requerimientos técnicos Software:</a:t>
+            </a:r>
+          </a:p>
+          <a:p>
             <a:endParaRPr lang="es-CO" sz="1600" dirty="0"/>
-          </a:p>
-          <a:p>
-            <a:endParaRPr lang="es-CO" sz="1600" dirty="0">
-              <a:latin typeface="Work Sans Light Roman" pitchFamily="2" charset="77"/>
-            </a:endParaRPr>
           </a:p>
           <a:p>
             <a:pPr marL="285750" indent="-285750">
@@ -6913,20 +7437,14 @@
               <a:buChar char="•"/>
             </a:pPr>
             <a:r>
-              <a:rPr lang="es-CO" sz="1600" b="1" dirty="0">
-                <a:latin typeface="Work Sans Light Roman" pitchFamily="2" charset="77"/>
-              </a:rPr>
+              <a:rPr lang="es-CO" sz="1600" b="1" dirty="0"/>
               <a:t>Apache NetBeans IDE 23: </a:t>
             </a:r>
             <a:r>
-              <a:rPr lang="es-CO" sz="1600" dirty="0">
-                <a:latin typeface="Work Sans Light Roman" pitchFamily="2" charset="77"/>
-              </a:rPr>
+              <a:rPr lang="es-CO" sz="1600" dirty="0"/>
               <a:t>Entorno de desarrollo donde se codifico el aplicativo</a:t>
             </a:r>
-            <a:endParaRPr lang="es-CO" sz="1600" b="1" dirty="0">
-              <a:latin typeface="Work Sans Light Roman" pitchFamily="2" charset="77"/>
-            </a:endParaRPr>
+            <a:endParaRPr lang="es-CO" sz="1600" b="1" dirty="0"/>
           </a:p>
           <a:p>
             <a:pPr marL="285750" indent="-285750">
@@ -6934,17 +7452,271 @@
               <a:buChar char="•"/>
             </a:pPr>
             <a:r>
-              <a:rPr lang="es-ES" sz="1600" b="1" dirty="0">
-                <a:latin typeface="Work Sans Light Roman" pitchFamily="2" charset="77"/>
+              <a:rPr lang="es-ES" sz="1600" b="1" dirty="0"/>
+              <a:t>XAMPP Control Panel v3.3.0: </a:t>
+            </a:r>
+            <a:r>
+              <a:rPr lang="es-ES" sz="1600" dirty="0"/>
+              <a:t>Usado para la base de datos</a:t>
+            </a:r>
+          </a:p>
+          <a:p>
+            <a:endParaRPr lang="es-ES" sz="1600" dirty="0"/>
+          </a:p>
+          <a:p>
+            <a:pPr>
+              <a:lnSpc>
+                <a:spcPct val="107000"/>
+              </a:lnSpc>
+              <a:spcBef>
+                <a:spcPts val="1800"/>
+              </a:spcBef>
+              <a:spcAft>
+                <a:spcPts val="400"/>
+              </a:spcAft>
+            </a:pPr>
+            <a:r>
+              <a:rPr lang="es-CO" sz="1600" b="1" dirty="0">
+                <a:effectLst/>
               </a:rPr>
-              <a:t>XAMPP Control Panel v3.3.0: </a:t>
-            </a:r>
-            <a:r>
-              <a:rPr lang="es-ES" sz="1600" dirty="0">
-                <a:latin typeface="Work Sans Light Roman" pitchFamily="2" charset="77"/>
+              <a:t>Requerimientos técnicos hardware:</a:t>
+            </a:r>
+          </a:p>
+          <a:p>
+            <a:pPr marL="342900" lvl="0" indent="-342900">
+              <a:lnSpc>
+                <a:spcPct val="107000"/>
+              </a:lnSpc>
+              <a:spcAft>
+                <a:spcPts val="800"/>
+              </a:spcAft>
+              <a:buFont typeface="Arial" panose="020B0604020202020204" pitchFamily="34" charset="0"/>
+              <a:buChar char="●"/>
+            </a:pPr>
+            <a:r>
+              <a:rPr lang="es-CO" sz="1600" dirty="0">
+                <a:solidFill>
+                  <a:srgbClr val="000000"/>
+                </a:solidFill>
+                <a:effectLst/>
+                <a:ea typeface="Noto Sans Symbols"/>
+                <a:cs typeface="Noto Sans Symbols"/>
               </a:rPr>
-              <a:t>Usado para la base de datos</a:t>
-            </a:r>
+              <a:t>Requisitos </a:t>
+            </a:r>
+            <a:r>
+              <a:rPr lang="es-CO" sz="1600" dirty="0">
+                <a:effectLst/>
+                <a:ea typeface="Noto Sans Symbols"/>
+                <a:cs typeface="Noto Sans Symbols"/>
+              </a:rPr>
+              <a:t>mínimos</a:t>
+            </a:r>
+            <a:r>
+              <a:rPr lang="es-CO" sz="1600" dirty="0">
+                <a:solidFill>
+                  <a:srgbClr val="000000"/>
+                </a:solidFill>
+                <a:effectLst/>
+                <a:ea typeface="Noto Sans Symbols"/>
+                <a:cs typeface="Noto Sans Symbols"/>
+              </a:rPr>
+              <a:t> de PC:</a:t>
+            </a:r>
+            <a:endParaRPr lang="es-CO" sz="1600" dirty="0">
+              <a:effectLst/>
+              <a:ea typeface="Noto Sans Symbols"/>
+              <a:cs typeface="Noto Sans Symbols"/>
+            </a:endParaRPr>
+          </a:p>
+          <a:p>
+            <a:pPr marL="742950" lvl="1" indent="-285750">
+              <a:lnSpc>
+                <a:spcPct val="107000"/>
+              </a:lnSpc>
+              <a:spcAft>
+                <a:spcPts val="800"/>
+              </a:spcAft>
+              <a:buFont typeface="Courier New" panose="02070309020205020404" pitchFamily="49" charset="0"/>
+              <a:buChar char="o"/>
+            </a:pPr>
+            <a:r>
+              <a:rPr lang="es-CO" sz="1600" dirty="0">
+                <a:solidFill>
+                  <a:srgbClr val="000000"/>
+                </a:solidFill>
+                <a:effectLst/>
+                <a:ea typeface="Courier New" panose="02070309020205020404" pitchFamily="49" charset="0"/>
+                <a:cs typeface="Courier New" panose="02070309020205020404" pitchFamily="49" charset="0"/>
+              </a:rPr>
+              <a:t> procesador 2.5hz, .</a:t>
+            </a:r>
+            <a:endParaRPr lang="es-CO" sz="1600" dirty="0">
+              <a:effectLst/>
+              <a:ea typeface="Courier New" panose="02070309020205020404" pitchFamily="49" charset="0"/>
+              <a:cs typeface="Courier New" panose="02070309020205020404" pitchFamily="49" charset="0"/>
+            </a:endParaRPr>
+          </a:p>
+          <a:p>
+            <a:pPr marL="742950" lvl="1" indent="-285750">
+              <a:lnSpc>
+                <a:spcPct val="107000"/>
+              </a:lnSpc>
+              <a:spcAft>
+                <a:spcPts val="800"/>
+              </a:spcAft>
+              <a:buFont typeface="Courier New" panose="02070309020205020404" pitchFamily="49" charset="0"/>
+              <a:buChar char="o"/>
+            </a:pPr>
+            <a:r>
+              <a:rPr lang="es-CO" sz="1600" dirty="0">
+                <a:solidFill>
+                  <a:srgbClr val="000000"/>
+                </a:solidFill>
+                <a:effectLst/>
+                <a:ea typeface="Courier New" panose="02070309020205020404" pitchFamily="49" charset="0"/>
+                <a:cs typeface="Courier New" panose="02070309020205020404" pitchFamily="49" charset="0"/>
+              </a:rPr>
+              <a:t>6gb de memoria </a:t>
+            </a:r>
+            <a:r>
+              <a:rPr lang="es-CO" sz="1600" dirty="0" err="1">
+                <a:solidFill>
+                  <a:srgbClr val="000000"/>
+                </a:solidFill>
+                <a:effectLst/>
+                <a:ea typeface="Courier New" panose="02070309020205020404" pitchFamily="49" charset="0"/>
+                <a:cs typeface="Courier New" panose="02070309020205020404" pitchFamily="49" charset="0"/>
+              </a:rPr>
+              <a:t>ram</a:t>
+            </a:r>
+            <a:r>
+              <a:rPr lang="es-CO" sz="1600" dirty="0">
+                <a:solidFill>
+                  <a:srgbClr val="000000"/>
+                </a:solidFill>
+                <a:effectLst/>
+                <a:ea typeface="Courier New" panose="02070309020205020404" pitchFamily="49" charset="0"/>
+                <a:cs typeface="Courier New" panose="02070309020205020404" pitchFamily="49" charset="0"/>
+              </a:rPr>
+              <a:t> a 1200hz.</a:t>
+            </a:r>
+            <a:endParaRPr lang="es-CO" sz="1600" dirty="0">
+              <a:effectLst/>
+              <a:ea typeface="Courier New" panose="02070309020205020404" pitchFamily="49" charset="0"/>
+              <a:cs typeface="Courier New" panose="02070309020205020404" pitchFamily="49" charset="0"/>
+            </a:endParaRPr>
+          </a:p>
+          <a:p>
+            <a:pPr marL="342900" lvl="0" indent="-342900">
+              <a:lnSpc>
+                <a:spcPct val="107000"/>
+              </a:lnSpc>
+              <a:spcAft>
+                <a:spcPts val="800"/>
+              </a:spcAft>
+              <a:buFont typeface="Arial" panose="020B0604020202020204" pitchFamily="34" charset="0"/>
+              <a:buChar char="●"/>
+            </a:pPr>
+            <a:r>
+              <a:rPr lang="es-CO" sz="1600" dirty="0">
+                <a:solidFill>
+                  <a:srgbClr val="000000"/>
+                </a:solidFill>
+                <a:effectLst/>
+                <a:ea typeface="Noto Sans Symbols"/>
+                <a:cs typeface="Noto Sans Symbols"/>
+              </a:rPr>
+              <a:t>Requisitos recomendados de PC:</a:t>
+            </a:r>
+            <a:endParaRPr lang="es-CO" sz="1600" dirty="0">
+              <a:effectLst/>
+              <a:ea typeface="Noto Sans Symbols"/>
+              <a:cs typeface="Noto Sans Symbols"/>
+            </a:endParaRPr>
+          </a:p>
+          <a:p>
+            <a:pPr marL="742950" lvl="1" indent="-285750">
+              <a:lnSpc>
+                <a:spcPct val="107000"/>
+              </a:lnSpc>
+              <a:spcAft>
+                <a:spcPts val="800"/>
+              </a:spcAft>
+              <a:buFont typeface="Courier New" panose="02070309020205020404" pitchFamily="49" charset="0"/>
+              <a:buChar char="o"/>
+            </a:pPr>
+            <a:r>
+              <a:rPr lang="es-CO" sz="1600" dirty="0">
+                <a:solidFill>
+                  <a:srgbClr val="000000"/>
+                </a:solidFill>
+                <a:effectLst/>
+                <a:ea typeface="Courier New" panose="02070309020205020404" pitchFamily="49" charset="0"/>
+                <a:cs typeface="Courier New" panose="02070309020205020404" pitchFamily="49" charset="0"/>
+              </a:rPr>
+              <a:t>Procesador 2.9hz.</a:t>
+            </a:r>
+            <a:endParaRPr lang="es-CO" sz="1600" dirty="0">
+              <a:effectLst/>
+              <a:ea typeface="Courier New" panose="02070309020205020404" pitchFamily="49" charset="0"/>
+              <a:cs typeface="Courier New" panose="02070309020205020404" pitchFamily="49" charset="0"/>
+            </a:endParaRPr>
+          </a:p>
+          <a:p>
+            <a:pPr marL="742950" lvl="1" indent="-285750">
+              <a:lnSpc>
+                <a:spcPct val="107000"/>
+              </a:lnSpc>
+              <a:spcAft>
+                <a:spcPts val="800"/>
+              </a:spcAft>
+              <a:buFont typeface="Courier New" panose="02070309020205020404" pitchFamily="49" charset="0"/>
+              <a:buChar char="o"/>
+            </a:pPr>
+            <a:r>
+              <a:rPr lang="es-CO" sz="1600" dirty="0">
+                <a:solidFill>
+                  <a:srgbClr val="000000"/>
+                </a:solidFill>
+                <a:effectLst/>
+                <a:ea typeface="Courier New" panose="02070309020205020404" pitchFamily="49" charset="0"/>
+                <a:cs typeface="Courier New" panose="02070309020205020404" pitchFamily="49" charset="0"/>
+              </a:rPr>
+              <a:t>8gb de memoria </a:t>
+            </a:r>
+            <a:r>
+              <a:rPr lang="es-CO" sz="1600" dirty="0" err="1">
+                <a:solidFill>
+                  <a:srgbClr val="000000"/>
+                </a:solidFill>
+                <a:effectLst/>
+                <a:ea typeface="Courier New" panose="02070309020205020404" pitchFamily="49" charset="0"/>
+                <a:cs typeface="Courier New" panose="02070309020205020404" pitchFamily="49" charset="0"/>
+              </a:rPr>
+              <a:t>ram</a:t>
+            </a:r>
+            <a:r>
+              <a:rPr lang="es-CO" sz="1600" dirty="0">
+                <a:solidFill>
+                  <a:srgbClr val="000000"/>
+                </a:solidFill>
+                <a:effectLst/>
+                <a:ea typeface="Courier New" panose="02070309020205020404" pitchFamily="49" charset="0"/>
+                <a:cs typeface="Courier New" panose="02070309020205020404" pitchFamily="49" charset="0"/>
+              </a:rPr>
+              <a:t> a 1600hz.</a:t>
+            </a:r>
+            <a:endParaRPr lang="es-CO" sz="1600" dirty="0">
+              <a:effectLst/>
+              <a:ea typeface="Courier New" panose="02070309020205020404" pitchFamily="49" charset="0"/>
+              <a:cs typeface="Courier New" panose="02070309020205020404" pitchFamily="49" charset="0"/>
+            </a:endParaRPr>
+          </a:p>
+          <a:p>
+            <a:endParaRPr lang="es-ES" sz="1600" dirty="0">
+              <a:latin typeface="Work Sans Light Roman" pitchFamily="2" charset="77"/>
+            </a:endParaRPr>
           </a:p>
           <a:p>
             <a:pPr marL="285750" indent="-285750">
@@ -6970,7 +7742,7 @@
 </p:sld>
 </file>
 
-<file path=ppt/slides/slide7.xml><?xml version="1.0" encoding="utf-8"?>
+<file path=ppt/slides/slide9.xml><?xml version="1.0" encoding="utf-8"?>
 <p:sld xmlns:a="http://schemas.openxmlformats.org/drawingml/2006/main" xmlns:r="http://schemas.openxmlformats.org/officeDocument/2006/relationships" xmlns:p="http://schemas.openxmlformats.org/presentationml/2006/main">
   <p:cSld>
     <p:bg>
@@ -7205,447 +7977,6 @@
     <p:extLst>
       <p:ext uri="{BB962C8B-B14F-4D97-AF65-F5344CB8AC3E}">
         <p14:creationId xmlns:p14="http://schemas.microsoft.com/office/powerpoint/2010/main" val="1971142826"/>
-      </p:ext>
-    </p:extLst>
-  </p:cSld>
-  <p:clrMapOvr>
-    <a:masterClrMapping/>
-  </p:clrMapOvr>
-</p:sld>
-</file>
-
-<file path=ppt/slides/slide8.xml><?xml version="1.0" encoding="utf-8"?>
-<p:sld xmlns:a="http://schemas.openxmlformats.org/drawingml/2006/main" xmlns:r="http://schemas.openxmlformats.org/officeDocument/2006/relationships" xmlns:p="http://schemas.openxmlformats.org/presentationml/2006/main">
-  <p:cSld>
-    <p:bg>
-      <p:bgPr>
-        <a:blipFill dpi="0" rotWithShape="1">
-          <a:blip r:embed="rId2">
-            <a:lum/>
-          </a:blip>
-          <a:srcRect/>
-          <a:stretch>
-            <a:fillRect/>
-          </a:stretch>
-        </a:blipFill>
-        <a:effectLst/>
-      </p:bgPr>
-    </p:bg>
-    <p:spTree>
-      <p:nvGrpSpPr>
-        <p:cNvPr id="1" name=""/>
-        <p:cNvGrpSpPr/>
-        <p:nvPr/>
-      </p:nvGrpSpPr>
-      <p:grpSpPr>
-        <a:xfrm>
-          <a:off x="0" y="0"/>
-          <a:ext cx="0" cy="0"/>
-          <a:chOff x="0" y="0"/>
-          <a:chExt cx="0" cy="0"/>
-        </a:xfrm>
-      </p:grpSpPr>
-      <p:sp>
-        <p:nvSpPr>
-          <p:cNvPr id="2" name="Título 1">
-            <a:extLst>
-              <a:ext uri="{FF2B5EF4-FFF2-40B4-BE49-F238E27FC236}">
-                <a16:creationId xmlns:a16="http://schemas.microsoft.com/office/drawing/2014/main" id="{2ACE75F1-F343-8856-BC69-4BB6B82BF3E4}"/>
-              </a:ext>
-            </a:extLst>
-          </p:cNvPr>
-          <p:cNvSpPr txBox="1">
-            <a:spLocks/>
-          </p:cNvSpPr>
-          <p:nvPr/>
-        </p:nvSpPr>
-        <p:spPr>
-          <a:xfrm>
-            <a:off x="456236" y="416689"/>
-            <a:ext cx="9815809" cy="741563"/>
-          </a:xfrm>
-          <a:prstGeom prst="rect">
-            <a:avLst/>
-          </a:prstGeom>
-          <a:ln>
-            <a:noFill/>
-          </a:ln>
-        </p:spPr>
-        <p:txBody>
-          <a:bodyPr/>
-          <a:lstStyle>
-            <a:lvl1pPr algn="l" defTabSz="914400" rtl="0" eaLnBrk="1" latinLnBrk="0" hangingPunct="1">
-              <a:lnSpc>
-                <a:spcPct val="90000"/>
-              </a:lnSpc>
-              <a:spcBef>
-                <a:spcPct val="0"/>
-              </a:spcBef>
-              <a:buNone/>
-              <a:defRPr sz="4400" kern="1200">
-                <a:solidFill>
-                  <a:schemeClr val="tx1"/>
-                </a:solidFill>
-                <a:latin typeface="+mj-lt"/>
-                <a:ea typeface="+mj-ea"/>
-                <a:cs typeface="+mj-cs"/>
-              </a:defRPr>
-            </a:lvl1pPr>
-          </a:lstStyle>
-          <a:p>
-            <a:pPr lvl="0">
-              <a:defRPr/>
-            </a:pPr>
-            <a:r>
-              <a:rPr lang="es-CO" sz="3600" b="1" dirty="0">
-                <a:solidFill>
-                  <a:srgbClr val="4D4D4C"/>
-                </a:solidFill>
-                <a:latin typeface="WORK SANS BOLD ROMAN" pitchFamily="2" charset="77"/>
-              </a:rPr>
-              <a:t>Vista </a:t>
-            </a:r>
-            <a:r>
-              <a:rPr lang="es-CO" sz="3600" b="1" dirty="0" err="1">
-                <a:solidFill>
-                  <a:srgbClr val="4D4D4C"/>
-                </a:solidFill>
-                <a:latin typeface="WORK SANS BOLD ROMAN" pitchFamily="2" charset="77"/>
-              </a:rPr>
-              <a:t>Login</a:t>
-            </a:r>
-            <a:r>
-              <a:rPr lang="es-CO" sz="3600" b="1" dirty="0">
-                <a:solidFill>
-                  <a:srgbClr val="4D4D4C"/>
-                </a:solidFill>
-                <a:latin typeface="WORK SANS BOLD ROMAN" pitchFamily="2" charset="77"/>
-              </a:rPr>
-              <a:t> del administrador</a:t>
-            </a:r>
-            <a:endParaRPr kumimoji="0" lang="es-CO" sz="3600" b="1" u="none" strike="noStrike" kern="1200" cap="none" spc="0" normalizeH="0" baseline="0" noProof="0" dirty="0">
-              <a:ln>
-                <a:noFill/>
-              </a:ln>
-              <a:solidFill>
-                <a:srgbClr val="4D4D4C"/>
-              </a:solidFill>
-              <a:effectLst/>
-              <a:uLnTx/>
-              <a:uFillTx/>
-              <a:latin typeface="WORK SANS BOLD ROMAN" pitchFamily="2" charset="77"/>
-            </a:endParaRPr>
-          </a:p>
-        </p:txBody>
-      </p:sp>
-      <p:sp>
-        <p:nvSpPr>
-          <p:cNvPr id="3" name="CuadroTexto 2">
-            <a:extLst>
-              <a:ext uri="{FF2B5EF4-FFF2-40B4-BE49-F238E27FC236}">
-                <a16:creationId xmlns:a16="http://schemas.microsoft.com/office/drawing/2014/main" id="{A6C31FC2-6C63-0CB9-C78D-1723D5E9DD66}"/>
-              </a:ext>
-            </a:extLst>
-          </p:cNvPr>
-          <p:cNvSpPr txBox="1"/>
-          <p:nvPr/>
-        </p:nvSpPr>
-        <p:spPr>
-          <a:xfrm>
-            <a:off x="1810902" y="1889573"/>
-            <a:ext cx="7637898" cy="2862322"/>
-          </a:xfrm>
-          <a:prstGeom prst="rect">
-            <a:avLst/>
-          </a:prstGeom>
-          <a:noFill/>
-        </p:spPr>
-        <p:txBody>
-          <a:bodyPr wrap="square" rtlCol="0">
-            <a:spAutoFit/>
-          </a:bodyPr>
-          <a:lstStyle/>
-          <a:p>
-            <a:pPr marL="285750" indent="-285750">
-              <a:buFont typeface="Arial" panose="020B0604020202020204" pitchFamily="34" charset="0"/>
-              <a:buChar char="•"/>
-            </a:pPr>
-            <a:r>
-              <a:rPr lang="es-ES" sz="2000" dirty="0"/>
-              <a:t>El sistema debe autenticar a los usuarios utilizando un nombre de usuario y una contraseña provenientes de la base de datos.</a:t>
-            </a:r>
-          </a:p>
-          <a:p>
-            <a:pPr marL="285750" indent="-285750">
-              <a:buFont typeface="Arial" panose="020B0604020202020204" pitchFamily="34" charset="0"/>
-              <a:buChar char="•"/>
-            </a:pPr>
-            <a:r>
-              <a:rPr lang="es-ES" sz="2000" dirty="0"/>
-              <a:t>El sistema debe verificar las credenciales contra la base de datos antes de permitir el acceso.</a:t>
-            </a:r>
-          </a:p>
-          <a:p>
-            <a:pPr marL="285750" indent="-285750">
-              <a:buFont typeface="Arial" panose="020B0604020202020204" pitchFamily="34" charset="0"/>
-              <a:buChar char="•"/>
-            </a:pPr>
-            <a:r>
-              <a:rPr lang="es-ES" sz="2000" dirty="0"/>
-              <a:t>Los usuarios deben ser redirigidos a la pantalla principal tras un </a:t>
-            </a:r>
-            <a:r>
-              <a:rPr lang="es-ES" sz="2000" dirty="0" err="1"/>
-              <a:t>login</a:t>
-            </a:r>
-            <a:r>
-              <a:rPr lang="es-ES" sz="2000" dirty="0"/>
-              <a:t> exitoso.</a:t>
-            </a:r>
-          </a:p>
-          <a:p>
-            <a:pPr marL="285750" indent="-285750">
-              <a:buFont typeface="Arial" panose="020B0604020202020204" pitchFamily="34" charset="0"/>
-              <a:buChar char="•"/>
-            </a:pPr>
-            <a:r>
-              <a:rPr lang="es-ES" sz="2000" dirty="0"/>
-              <a:t>El sistema debe mostrar mensajes de error si las credenciales son incorrectas.</a:t>
-            </a:r>
-          </a:p>
-          <a:p>
-            <a:pPr marL="285750" indent="-285750">
-              <a:buFont typeface="Arial" panose="020B0604020202020204" pitchFamily="34" charset="0"/>
-              <a:buChar char="•"/>
-            </a:pPr>
-            <a:endParaRPr lang="es-ES" sz="2000" dirty="0">
-              <a:latin typeface="Work Sans Light Roman" pitchFamily="2" charset="77"/>
-            </a:endParaRPr>
-          </a:p>
-        </p:txBody>
-      </p:sp>
-    </p:spTree>
-    <p:extLst>
-      <p:ext uri="{BB962C8B-B14F-4D97-AF65-F5344CB8AC3E}">
-        <p14:creationId xmlns:p14="http://schemas.microsoft.com/office/powerpoint/2010/main" val="458058105"/>
-      </p:ext>
-    </p:extLst>
-  </p:cSld>
-  <p:clrMapOvr>
-    <a:masterClrMapping/>
-  </p:clrMapOvr>
-</p:sld>
-</file>
-
-<file path=ppt/slides/slide9.xml><?xml version="1.0" encoding="utf-8"?>
-<p:sld xmlns:a="http://schemas.openxmlformats.org/drawingml/2006/main" xmlns:r="http://schemas.openxmlformats.org/officeDocument/2006/relationships" xmlns:p="http://schemas.openxmlformats.org/presentationml/2006/main">
-  <p:cSld>
-    <p:spTree>
-      <p:nvGrpSpPr>
-        <p:cNvPr id="1" name="">
-          <a:extLst>
-            <a:ext uri="{FF2B5EF4-FFF2-40B4-BE49-F238E27FC236}">
-              <a16:creationId xmlns:a16="http://schemas.microsoft.com/office/drawing/2014/main" id="{CBADFBB1-D500-4C37-6659-DEDEBD1207D8}"/>
-            </a:ext>
-          </a:extLst>
-        </p:cNvPr>
-        <p:cNvGrpSpPr/>
-        <p:nvPr/>
-      </p:nvGrpSpPr>
-      <p:grpSpPr>
-        <a:xfrm>
-          <a:off x="0" y="0"/>
-          <a:ext cx="0" cy="0"/>
-          <a:chOff x="0" y="0"/>
-          <a:chExt cx="0" cy="0"/>
-        </a:xfrm>
-      </p:grpSpPr>
-      <p:sp>
-        <p:nvSpPr>
-          <p:cNvPr id="2" name="Título 1">
-            <a:extLst>
-              <a:ext uri="{FF2B5EF4-FFF2-40B4-BE49-F238E27FC236}">
-                <a16:creationId xmlns:a16="http://schemas.microsoft.com/office/drawing/2014/main" id="{73484F97-0579-07D3-A0F7-ED0540A0595C}"/>
-              </a:ext>
-            </a:extLst>
-          </p:cNvPr>
-          <p:cNvSpPr txBox="1">
-            <a:spLocks/>
-          </p:cNvSpPr>
-          <p:nvPr/>
-        </p:nvSpPr>
-        <p:spPr>
-          <a:xfrm>
-            <a:off x="456236" y="416689"/>
-            <a:ext cx="9815809" cy="741563"/>
-          </a:xfrm>
-          <a:prstGeom prst="rect">
-            <a:avLst/>
-          </a:prstGeom>
-          <a:ln>
-            <a:noFill/>
-          </a:ln>
-        </p:spPr>
-        <p:txBody>
-          <a:bodyPr/>
-          <a:lstStyle>
-            <a:lvl1pPr algn="l" defTabSz="914400" rtl="0" eaLnBrk="1" latinLnBrk="0" hangingPunct="1">
-              <a:lnSpc>
-                <a:spcPct val="90000"/>
-              </a:lnSpc>
-              <a:spcBef>
-                <a:spcPct val="0"/>
-              </a:spcBef>
-              <a:buNone/>
-              <a:defRPr sz="4400" kern="1200">
-                <a:solidFill>
-                  <a:schemeClr val="tx1"/>
-                </a:solidFill>
-                <a:latin typeface="+mj-lt"/>
-                <a:ea typeface="+mj-ea"/>
-                <a:cs typeface="+mj-cs"/>
-              </a:defRPr>
-            </a:lvl1pPr>
-          </a:lstStyle>
-          <a:p>
-            <a:pPr lvl="0">
-              <a:defRPr/>
-            </a:pPr>
-            <a:r>
-              <a:rPr lang="es-CO" sz="3600" b="1" dirty="0">
-                <a:solidFill>
-                  <a:srgbClr val="4D4D4C"/>
-                </a:solidFill>
-                <a:latin typeface="WORK SANS BOLD ROMAN" pitchFamily="2" charset="77"/>
-              </a:rPr>
-              <a:t>Vista Circuito</a:t>
-            </a:r>
-            <a:endParaRPr kumimoji="0" lang="es-CO" sz="3600" b="1" u="none" strike="noStrike" kern="1200" cap="none" spc="0" normalizeH="0" baseline="0" noProof="0" dirty="0">
-              <a:ln>
-                <a:noFill/>
-              </a:ln>
-              <a:solidFill>
-                <a:srgbClr val="4D4D4C"/>
-              </a:solidFill>
-              <a:effectLst/>
-              <a:uLnTx/>
-              <a:uFillTx/>
-              <a:latin typeface="WORK SANS BOLD ROMAN" pitchFamily="2" charset="77"/>
-            </a:endParaRPr>
-          </a:p>
-        </p:txBody>
-      </p:sp>
-      <p:sp>
-        <p:nvSpPr>
-          <p:cNvPr id="3" name="CuadroTexto 2">
-            <a:extLst>
-              <a:ext uri="{FF2B5EF4-FFF2-40B4-BE49-F238E27FC236}">
-                <a16:creationId xmlns:a16="http://schemas.microsoft.com/office/drawing/2014/main" id="{BEF446E8-C5E0-8992-43C6-55C79CEFBDB1}"/>
-              </a:ext>
-            </a:extLst>
-          </p:cNvPr>
-          <p:cNvSpPr txBox="1"/>
-          <p:nvPr/>
-        </p:nvSpPr>
-        <p:spPr>
-          <a:xfrm>
-            <a:off x="1810902" y="1889573"/>
-            <a:ext cx="7637898" cy="4093428"/>
-          </a:xfrm>
-          <a:prstGeom prst="rect">
-            <a:avLst/>
-          </a:prstGeom>
-          <a:noFill/>
-        </p:spPr>
-        <p:txBody>
-          <a:bodyPr wrap="square" rtlCol="0">
-            <a:spAutoFit/>
-          </a:bodyPr>
-          <a:lstStyle/>
-          <a:p>
-            <a:pPr marL="285750" indent="-285750">
-              <a:buFont typeface="Arial" panose="020B0604020202020204" pitchFamily="34" charset="0"/>
-              <a:buChar char="•"/>
-            </a:pPr>
-            <a:r>
-              <a:rPr lang="es-ES" sz="2000" dirty="0"/>
-              <a:t>El sistema debe permitir crear, leer, actualizar y eliminar (CRUD) circuitos.</a:t>
-            </a:r>
-          </a:p>
-          <a:p>
-            <a:pPr marL="285750" indent="-285750">
-              <a:buFont typeface="Arial" panose="020B0604020202020204" pitchFamily="34" charset="0"/>
-              <a:buChar char="•"/>
-            </a:pPr>
-            <a:r>
-              <a:rPr lang="es-ES" sz="2000" dirty="0"/>
-              <a:t>Los circuitos deben ser seleccionables desde la tabla para ser editados o eliminados.</a:t>
-            </a:r>
-          </a:p>
-          <a:p>
-            <a:pPr marL="285750" indent="-285750">
-              <a:buFont typeface="Arial" panose="020B0604020202020204" pitchFamily="34" charset="0"/>
-              <a:buChar char="•"/>
-            </a:pPr>
-            <a:r>
-              <a:rPr lang="es-ES" sz="2000" dirty="0">
-                <a:latin typeface="Work Sans Light Roman" pitchFamily="2" charset="77"/>
-              </a:rPr>
-              <a:t>El sistema debe permitir listar en combo box los circuitos para ser listados </a:t>
-            </a:r>
-          </a:p>
-          <a:p>
-            <a:pPr marL="285750" indent="-285750">
-              <a:buFont typeface="Arial" panose="020B0604020202020204" pitchFamily="34" charset="0"/>
-              <a:buChar char="•"/>
-            </a:pPr>
-            <a:r>
-              <a:rPr lang="es-ES" sz="2000" dirty="0">
-                <a:latin typeface="Work Sans Light Roman" pitchFamily="2" charset="77"/>
-              </a:rPr>
-              <a:t>El sistema debe permitir crear, leer, actualizar y eliminar los ejercicios emparejados al circuito.</a:t>
-            </a:r>
-          </a:p>
-          <a:p>
-            <a:pPr marL="285750" indent="-285750">
-              <a:buFont typeface="Arial" panose="020B0604020202020204" pitchFamily="34" charset="0"/>
-              <a:buChar char="•"/>
-            </a:pPr>
-            <a:r>
-              <a:rPr lang="es-ES" sz="2000" dirty="0">
-                <a:latin typeface="Work Sans Light Roman" pitchFamily="2" charset="77"/>
-              </a:rPr>
-              <a:t>Los ejercicios emparejados al circuito deben ser seleccionables desde la tabla para ser editados o eliminados.</a:t>
-            </a:r>
-          </a:p>
-          <a:p>
-            <a:pPr marL="285750" indent="-285750">
-              <a:buFont typeface="Arial" panose="020B0604020202020204" pitchFamily="34" charset="0"/>
-              <a:buChar char="•"/>
-            </a:pPr>
-            <a:r>
-              <a:rPr lang="es-ES" sz="2000" dirty="0"/>
-              <a:t>La interfaz debe permitir cancelar una acción en proceso (crear o editar un circuito).</a:t>
-            </a:r>
-            <a:endParaRPr lang="es-ES" sz="2000" dirty="0">
-              <a:latin typeface="Work Sans Light Roman" pitchFamily="2" charset="77"/>
-            </a:endParaRPr>
-          </a:p>
-          <a:p>
-            <a:pPr marL="285750" indent="-285750">
-              <a:buFont typeface="Arial" panose="020B0604020202020204" pitchFamily="34" charset="0"/>
-              <a:buChar char="•"/>
-            </a:pPr>
-            <a:endParaRPr lang="es-ES" sz="2000" dirty="0">
-              <a:latin typeface="Work Sans Light Roman" pitchFamily="2" charset="77"/>
-            </a:endParaRPr>
-          </a:p>
-        </p:txBody>
-      </p:sp>
-    </p:spTree>
-    <p:extLst>
-      <p:ext uri="{BB962C8B-B14F-4D97-AF65-F5344CB8AC3E}">
-        <p14:creationId xmlns:p14="http://schemas.microsoft.com/office/powerpoint/2010/main" val="3600706445"/>
       </p:ext>
     </p:extLst>
   </p:cSld>

--- a/Proyecto/Presentacion.pptx
+++ b/Proyecto/Presentacion.pptx
@@ -247,7 +247,7 @@
           <a:p>
             <a:fld id="{88369B9F-131C-2846-AB8F-CEE154B4CAEB}" type="datetimeFigureOut">
               <a:rPr lang="es-CO" smtClean="0"/>
-              <a:t>22/11/2024</a:t>
+              <a:t>1/02/2025</a:t>
             </a:fld>
             <a:endParaRPr lang="es-CO"/>
           </a:p>
@@ -424,7 +424,7 @@
           <a:p>
             <a:fld id="{9660CB96-A603-FF42-AE46-F5F75F80A67B}" type="datetimeFigureOut">
               <a:rPr lang="es-CO" smtClean="0"/>
-              <a:t>22/11/2024</a:t>
+              <a:t>1/02/2025</a:t>
             </a:fld>
             <a:endParaRPr lang="es-CO"/>
           </a:p>
@@ -841,7 +841,7 @@
           <a:p>
             <a:fld id="{BD986248-06F7-A441-A47A-264EBD310E11}" type="datetimeFigureOut">
               <a:rPr lang="es-CO" smtClean="0"/>
-              <a:t>22/11/2024</a:t>
+              <a:t>1/02/2025</a:t>
             </a:fld>
             <a:endParaRPr lang="es-CO"/>
           </a:p>
@@ -1041,7 +1041,7 @@
           <a:p>
             <a:fld id="{BD986248-06F7-A441-A47A-264EBD310E11}" type="datetimeFigureOut">
               <a:rPr lang="es-CO" smtClean="0"/>
-              <a:t>22/11/2024</a:t>
+              <a:t>1/02/2025</a:t>
             </a:fld>
             <a:endParaRPr lang="es-CO"/>
           </a:p>
@@ -1251,7 +1251,7 @@
           <a:p>
             <a:fld id="{BD986248-06F7-A441-A47A-264EBD310E11}" type="datetimeFigureOut">
               <a:rPr lang="es-CO" smtClean="0"/>
-              <a:t>22/11/2024</a:t>
+              <a:t>1/02/2025</a:t>
             </a:fld>
             <a:endParaRPr lang="es-CO"/>
           </a:p>
@@ -1412,7 +1412,7 @@
           <a:p>
             <a:fld id="{BD986248-06F7-A441-A47A-264EBD310E11}" type="datetimeFigureOut">
               <a:rPr lang="es-CO" smtClean="0"/>
-              <a:t>22/11/2024</a:t>
+              <a:t>1/02/2025</a:t>
             </a:fld>
             <a:endParaRPr lang="es-CO"/>
           </a:p>
@@ -1612,7 +1612,7 @@
           <a:p>
             <a:fld id="{BD986248-06F7-A441-A47A-264EBD310E11}" type="datetimeFigureOut">
               <a:rPr lang="es-CO" smtClean="0"/>
-              <a:t>22/11/2024</a:t>
+              <a:t>1/02/2025</a:t>
             </a:fld>
             <a:endParaRPr lang="es-CO"/>
           </a:p>
@@ -1888,7 +1888,7 @@
           <a:p>
             <a:fld id="{BD986248-06F7-A441-A47A-264EBD310E11}" type="datetimeFigureOut">
               <a:rPr lang="es-CO" smtClean="0"/>
-              <a:t>22/11/2024</a:t>
+              <a:t>1/02/2025</a:t>
             </a:fld>
             <a:endParaRPr lang="es-CO"/>
           </a:p>
@@ -2156,7 +2156,7 @@
           <a:p>
             <a:fld id="{BD986248-06F7-A441-A47A-264EBD310E11}" type="datetimeFigureOut">
               <a:rPr lang="es-CO" smtClean="0"/>
-              <a:t>22/11/2024</a:t>
+              <a:t>1/02/2025</a:t>
             </a:fld>
             <a:endParaRPr lang="es-CO"/>
           </a:p>
@@ -2571,7 +2571,7 @@
           <a:p>
             <a:fld id="{BD986248-06F7-A441-A47A-264EBD310E11}" type="datetimeFigureOut">
               <a:rPr lang="es-CO" smtClean="0"/>
-              <a:t>22/11/2024</a:t>
+              <a:t>1/02/2025</a:t>
             </a:fld>
             <a:endParaRPr lang="es-CO"/>
           </a:p>
@@ -2713,7 +2713,7 @@
           <a:p>
             <a:fld id="{BD986248-06F7-A441-A47A-264EBD310E11}" type="datetimeFigureOut">
               <a:rPr lang="es-CO" smtClean="0"/>
-              <a:t>22/11/2024</a:t>
+              <a:t>1/02/2025</a:t>
             </a:fld>
             <a:endParaRPr lang="es-CO"/>
           </a:p>
@@ -2826,7 +2826,7 @@
           <a:p>
             <a:fld id="{BD986248-06F7-A441-A47A-264EBD310E11}" type="datetimeFigureOut">
               <a:rPr lang="es-CO" smtClean="0"/>
-              <a:t>22/11/2024</a:t>
+              <a:t>1/02/2025</a:t>
             </a:fld>
             <a:endParaRPr lang="es-CO"/>
           </a:p>
@@ -3155,7 +3155,7 @@
           <a:p>
             <a:fld id="{BD986248-06F7-A441-A47A-264EBD310E11}" type="datetimeFigureOut">
               <a:rPr lang="es-CO" smtClean="0"/>
-              <a:t>22/11/2024</a:t>
+              <a:t>1/02/2025</a:t>
             </a:fld>
             <a:endParaRPr lang="es-CO"/>
           </a:p>
@@ -3444,7 +3444,7 @@
           <a:p>
             <a:fld id="{BD986248-06F7-A441-A47A-264EBD310E11}" type="datetimeFigureOut">
               <a:rPr lang="es-CO" smtClean="0"/>
-              <a:t>22/11/2024</a:t>
+              <a:t>1/02/2025</a:t>
             </a:fld>
             <a:endParaRPr lang="es-CO"/>
           </a:p>
@@ -3687,7 +3687,7 @@
           <a:p>
             <a:fld id="{BD986248-06F7-A441-A47A-264EBD310E11}" type="datetimeFigureOut">
               <a:rPr lang="es-CO" smtClean="0"/>
-              <a:t>22/11/2024</a:t>
+              <a:t>1/02/2025</a:t>
             </a:fld>
             <a:endParaRPr lang="es-CO"/>
           </a:p>
@@ -4134,7 +4134,7 @@
         <p:spPr>
           <a:xfrm>
             <a:off x="1039871" y="2365570"/>
-            <a:ext cx="6453678" cy="1323439"/>
+            <a:ext cx="6453678" cy="1938992"/>
           </a:xfrm>
           <a:prstGeom prst="rect">
             <a:avLst/>
@@ -4185,7 +4185,77 @@
               </a:rPr>
               <a:t>GigaGains</a:t>
             </a:r>
-            <a:endParaRPr kumimoji="0" lang="es-ES" sz="4000" b="1" i="0" u="none" strike="noStrike" kern="1200" cap="none" spc="0" normalizeH="0" baseline="0" noProof="0" dirty="0">
+            <a:endParaRPr lang="es-ES" sz="4000" b="1" dirty="0">
+              <a:solidFill>
+                <a:prstClr val="black">
+                  <a:lumMod val="75000"/>
+                  <a:lumOff val="25000"/>
+                </a:prstClr>
+              </a:solidFill>
+              <a:latin typeface="Work Sans Bold Roman" pitchFamily="2" charset="77"/>
+            </a:endParaRPr>
+          </a:p>
+          <a:p>
+            <a:pPr marL="0" marR="0" lvl="0" indent="0" algn="l" defTabSz="914400" rtl="0" eaLnBrk="1" fontAlgn="auto" latinLnBrk="0" hangingPunct="1">
+              <a:spcBef>
+                <a:spcPts val="0"/>
+              </a:spcBef>
+              <a:spcAft>
+                <a:spcPts val="0"/>
+              </a:spcAft>
+              <a:buClrTx/>
+              <a:buSzTx/>
+              <a:buFontTx/>
+              <a:buNone/>
+              <a:tabLst/>
+              <a:defRPr/>
+            </a:pPr>
+            <a:endParaRPr kumimoji="0" lang="es-ES" sz="2000" b="1" i="0" u="none" strike="noStrike" kern="1200" cap="none" spc="0" normalizeH="0" baseline="0" noProof="0" dirty="0">
+              <a:ln>
+                <a:noFill/>
+              </a:ln>
+              <a:solidFill>
+                <a:prstClr val="black">
+                  <a:lumMod val="75000"/>
+                  <a:lumOff val="25000"/>
+                </a:prstClr>
+              </a:solidFill>
+              <a:effectLst/>
+              <a:uLnTx/>
+              <a:uFillTx/>
+              <a:latin typeface="Work Sans Bold Roman" pitchFamily="2" charset="77"/>
+              <a:ea typeface="+mn-ea"/>
+              <a:cs typeface="+mn-cs"/>
+            </a:endParaRPr>
+          </a:p>
+          <a:p>
+            <a:pPr marL="0" marR="0" lvl="0" indent="0" algn="l" defTabSz="914400" rtl="0" eaLnBrk="1" fontAlgn="auto" latinLnBrk="0" hangingPunct="1">
+              <a:spcBef>
+                <a:spcPts val="0"/>
+              </a:spcBef>
+              <a:spcAft>
+                <a:spcPts val="0"/>
+              </a:spcAft>
+              <a:buClrTx/>
+              <a:buSzTx/>
+              <a:buFontTx/>
+              <a:buNone/>
+              <a:tabLst/>
+              <a:defRPr/>
+            </a:pPr>
+            <a:r>
+              <a:rPr lang="es-ES" sz="2000" b="1" dirty="0">
+                <a:solidFill>
+                  <a:prstClr val="black">
+                    <a:lumMod val="75000"/>
+                    <a:lumOff val="25000"/>
+                  </a:prstClr>
+                </a:solidFill>
+                <a:latin typeface="Work Sans Bold Roman" pitchFamily="2" charset="77"/>
+              </a:rPr>
+              <a:t>David Alfredo Pulido Sarmiento // ADSO 2696521</a:t>
+            </a:r>
+            <a:endParaRPr kumimoji="0" lang="es-ES" sz="2000" b="1" i="0" u="none" strike="noStrike" kern="1200" cap="none" spc="0" normalizeH="0" baseline="0" noProof="0" dirty="0">
               <a:ln>
                 <a:noFill/>
               </a:ln>
@@ -4331,7 +4401,7 @@
         <p:spPr>
           <a:xfrm>
             <a:off x="456236" y="1158252"/>
-            <a:ext cx="11279528" cy="5541197"/>
+            <a:ext cx="11279528" cy="5452903"/>
           </a:xfrm>
           <a:prstGeom prst="rect">
             <a:avLst/>
@@ -4358,7 +4428,7 @@
               <a:buChar char=""/>
             </a:pPr>
             <a:r>
-              <a:rPr lang="es-MX" sz="1600" dirty="0">
+              <a:rPr lang="es-MX" sz="1400" dirty="0">
                 <a:solidFill>
                   <a:srgbClr val="000000"/>
                 </a:solidFill>
@@ -4368,7 +4438,7 @@
               </a:rPr>
               <a:t>El sistema debe autenticar a los administradores con su correo y contraseña provenientes de la base de datos y mostrar un mensaje de error si las credenciales son incorrectas.</a:t>
             </a:r>
-            <a:endParaRPr lang="es-CO" sz="1600" dirty="0">
+            <a:endParaRPr lang="es-CO" sz="1400" dirty="0">
               <a:effectLst/>
               <a:latin typeface="Calibri" panose="020F0502020204030204" pitchFamily="34" charset="0"/>
               <a:ea typeface="Calibri" panose="020F0502020204030204" pitchFamily="34" charset="0"/>
@@ -4389,7 +4459,7 @@
               <a:buChar char=""/>
             </a:pPr>
             <a:r>
-              <a:rPr lang="es-MX" sz="1600" dirty="0">
+              <a:rPr lang="es-MX" sz="1400" dirty="0">
                 <a:solidFill>
                   <a:srgbClr val="000000"/>
                 </a:solidFill>
@@ -4399,7 +4469,7 @@
               </a:rPr>
               <a:t>El sistema debe verificar si el usuario tiene rol de Administrador, Super Administrador o Usuario, si tiene rol de Usuario negar el acceso.</a:t>
             </a:r>
-            <a:endParaRPr lang="es-CO" sz="1600" dirty="0">
+            <a:endParaRPr lang="es-CO" sz="1400" dirty="0">
               <a:effectLst/>
               <a:latin typeface="Calibri" panose="020F0502020204030204" pitchFamily="34" charset="0"/>
               <a:ea typeface="Calibri" panose="020F0502020204030204" pitchFamily="34" charset="0"/>
@@ -4420,7 +4490,7 @@
               <a:buChar char=""/>
             </a:pPr>
             <a:r>
-              <a:rPr lang="es-MX" sz="1600" dirty="0">
+              <a:rPr lang="es-MX" sz="1400" dirty="0">
                 <a:solidFill>
                   <a:srgbClr val="000000"/>
                 </a:solidFill>
@@ -4431,7 +4501,7 @@
               <a:t>El sistema debe permitir </a:t>
             </a:r>
             <a:r>
-              <a:rPr lang="es-CO" sz="1600" dirty="0">
+              <a:rPr lang="es-CO" sz="1400" dirty="0">
                 <a:solidFill>
                   <a:srgbClr val="000000"/>
                 </a:solidFill>
@@ -4441,7 +4511,7 @@
               </a:rPr>
               <a:t>crear, editar, leer y borrar ejercicio, circuitos, rutinas, dietas y planes. En caso de ser Super Administrador debe permitir restablecer cualquier circuito, rutina, dieta o plan.</a:t>
             </a:r>
-            <a:endParaRPr lang="es-CO" sz="1600" dirty="0">
+            <a:endParaRPr lang="es-CO" sz="1400" dirty="0">
               <a:effectLst/>
               <a:latin typeface="Calibri" panose="020F0502020204030204" pitchFamily="34" charset="0"/>
               <a:ea typeface="Calibri" panose="020F0502020204030204" pitchFamily="34" charset="0"/>
@@ -4462,7 +4532,7 @@
               <a:buChar char=""/>
             </a:pPr>
             <a:r>
-              <a:rPr lang="es-CO" sz="1600" dirty="0">
+              <a:rPr lang="es-CO" sz="1400" dirty="0">
                 <a:solidFill>
                   <a:srgbClr val="000000"/>
                 </a:solidFill>
@@ -4472,7 +4542,7 @@
               </a:rPr>
               <a:t>El sistema debe permitir editar, leer y borrar usuarios. En caso de ser Super Administrador debe permitir editar el rol y restablecer usuarios.</a:t>
             </a:r>
-            <a:endParaRPr lang="es-CO" sz="1600" dirty="0">
+            <a:endParaRPr lang="es-CO" sz="1400" dirty="0">
               <a:effectLst/>
               <a:latin typeface="Calibri" panose="020F0502020204030204" pitchFamily="34" charset="0"/>
               <a:ea typeface="Calibri" panose="020F0502020204030204" pitchFamily="34" charset="0"/>
@@ -4493,7 +4563,7 @@
               <a:buChar char=""/>
             </a:pPr>
             <a:r>
-              <a:rPr lang="es-CO" sz="1600" dirty="0">
+              <a:rPr lang="es-CO" sz="1400" dirty="0">
                 <a:solidFill>
                   <a:srgbClr val="000000"/>
                 </a:solidFill>
@@ -4503,7 +4573,51 @@
               </a:rPr>
               <a:t>La interfaz debe permitir cancelar una acción en proceso (Crear o editar).</a:t>
             </a:r>
-            <a:endParaRPr lang="es-CO" sz="1600" dirty="0">
+            <a:endParaRPr lang="es-CO" sz="1400" dirty="0">
+              <a:effectLst/>
+              <a:latin typeface="Calibri" panose="020F0502020204030204" pitchFamily="34" charset="0"/>
+              <a:ea typeface="Calibri" panose="020F0502020204030204" pitchFamily="34" charset="0"/>
+            </a:endParaRPr>
+          </a:p>
+          <a:p>
+            <a:pPr marL="342900" lvl="0" indent="-342900">
+              <a:lnSpc>
+                <a:spcPct val="107000"/>
+              </a:lnSpc>
+              <a:buFont typeface="Symbol" panose="05050102010706020507" pitchFamily="18" charset="2"/>
+              <a:buChar char=""/>
+            </a:pPr>
+            <a:r>
+              <a:rPr lang="es-MX" sz="1400" dirty="0">
+                <a:effectLst/>
+                <a:latin typeface="Arial" panose="020B0604020202020204" pitchFamily="34" charset="0"/>
+                <a:ea typeface="Arial" panose="020B0604020202020204" pitchFamily="34" charset="0"/>
+              </a:rPr>
+              <a:t>El sistema debe permitir ver en una vista como está compuesto un plan, logrando ver la rutina, dieta, circuitos y ejercicios que componen el plan.</a:t>
+            </a:r>
+            <a:endParaRPr lang="es-CO" sz="1400" dirty="0">
+              <a:effectLst/>
+              <a:latin typeface="Calibri" panose="020F0502020204030204" pitchFamily="34" charset="0"/>
+              <a:ea typeface="Calibri" panose="020F0502020204030204" pitchFamily="34" charset="0"/>
+            </a:endParaRPr>
+          </a:p>
+          <a:p>
+            <a:pPr marL="342900" lvl="0" indent="-342900">
+              <a:lnSpc>
+                <a:spcPct val="107000"/>
+              </a:lnSpc>
+              <a:buFont typeface="Symbol" panose="05050102010706020507" pitchFamily="18" charset="2"/>
+              <a:buChar char=""/>
+            </a:pPr>
+            <a:r>
+              <a:rPr lang="es-MX" sz="1400" dirty="0">
+                <a:effectLst/>
+                <a:latin typeface="Arial" panose="020B0604020202020204" pitchFamily="34" charset="0"/>
+                <a:ea typeface="Arial" panose="020B0604020202020204" pitchFamily="34" charset="0"/>
+              </a:rPr>
+              <a:t>Visualizar el progreso de los usuarios atreves de pesos que se registran en la página web por ellos mismos.</a:t>
+            </a:r>
+            <a:endParaRPr lang="es-CO" sz="1400" dirty="0">
               <a:effectLst/>
               <a:latin typeface="Calibri" panose="020F0502020204030204" pitchFamily="34" charset="0"/>
               <a:ea typeface="Calibri" panose="020F0502020204030204" pitchFamily="34" charset="0"/>
@@ -4524,7 +4638,7 @@
               <a:buChar char=""/>
             </a:pPr>
             <a:r>
-              <a:rPr lang="es-MX" sz="1600" dirty="0">
+              <a:rPr lang="es-MX" sz="1400" dirty="0">
                 <a:solidFill>
                   <a:srgbClr val="000000"/>
                 </a:solidFill>
@@ -4534,7 +4648,11 @@
               </a:rPr>
               <a:t>Los campos solo deben recibir datos del tipo permitido en cada campo (número y/o letras).</a:t>
             </a:r>
-            <a:endParaRPr lang="es-ES" sz="2000" dirty="0"/>
+            <a:endParaRPr lang="es-CO" sz="1400" dirty="0">
+              <a:effectLst/>
+              <a:latin typeface="Calibri" panose="020F0502020204030204" pitchFamily="34" charset="0"/>
+              <a:ea typeface="Calibri" panose="020F0502020204030204" pitchFamily="34" charset="0"/>
+            </a:endParaRPr>
           </a:p>
         </p:txBody>
       </p:sp>
@@ -5485,10 +5603,10 @@
       </p:sp>
       <p:pic>
         <p:nvPicPr>
-          <p:cNvPr id="4" name="Imagen 3">
-            <a:extLst>
-              <a:ext uri="{FF2B5EF4-FFF2-40B4-BE49-F238E27FC236}">
-                <a16:creationId xmlns:a16="http://schemas.microsoft.com/office/drawing/2014/main" id="{FF9DDEE4-6EBD-41A3-B90F-6F95C10C4FA6}"/>
+          <p:cNvPr id="5" name="Imagen 4">
+            <a:extLst>
+              <a:ext uri="{FF2B5EF4-FFF2-40B4-BE49-F238E27FC236}">
+                <a16:creationId xmlns:a16="http://schemas.microsoft.com/office/drawing/2014/main" id="{DF9EE729-6EBE-D917-A14E-E309BBAB3637}"/>
               </a:ext>
             </a:extLst>
           </p:cNvPr>
@@ -5505,8 +5623,8 @@
         </p:blipFill>
         <p:spPr>
           <a:xfrm>
-            <a:off x="541866" y="1225984"/>
-            <a:ext cx="11108267" cy="5279671"/>
+            <a:off x="687552" y="977200"/>
+            <a:ext cx="10816896" cy="5333514"/>
           </a:xfrm>
           <a:prstGeom prst="rect">
             <a:avLst/>
@@ -6762,7 +6880,7 @@
         </p:nvSpPr>
         <p:spPr>
           <a:xfrm>
-            <a:off x="456236" y="416689"/>
+            <a:off x="456236" y="140239"/>
             <a:ext cx="9815809" cy="741563"/>
           </a:xfrm>
           <a:prstGeom prst="rect">
@@ -6823,8 +6941,8 @@
         </p:nvSpPr>
         <p:spPr>
           <a:xfrm>
-            <a:off x="577563" y="1423906"/>
-            <a:ext cx="11235209" cy="5012654"/>
+            <a:off x="456236" y="711682"/>
+            <a:ext cx="11235209" cy="6118983"/>
           </a:xfrm>
           <a:prstGeom prst="rect">
             <a:avLst/>
@@ -6855,7 +6973,7 @@
                 <a:effectLst/>
                 <a:latin typeface="Arial" panose="020B0604020202020204" pitchFamily="34" charset="0"/>
                 <a:ea typeface="Arial" panose="020B0604020202020204" pitchFamily="34" charset="0"/>
-                <a:cs typeface="Noto Sans Symbols"/>
+                <a:cs typeface="Arial" panose="020B0604020202020204" pitchFamily="34" charset="0"/>
               </a:rPr>
               <a:t>Desarrollar un aplicativo capaz de crear, editar, leer y borrar planes para la página web </a:t>
             </a:r>
@@ -6867,7 +6985,7 @@
                 <a:effectLst/>
                 <a:latin typeface="Arial" panose="020B0604020202020204" pitchFamily="34" charset="0"/>
                 <a:ea typeface="Arial" panose="020B0604020202020204" pitchFamily="34" charset="0"/>
-                <a:cs typeface="Noto Sans Symbols"/>
+                <a:cs typeface="Arial" panose="020B0604020202020204" pitchFamily="34" charset="0"/>
               </a:rPr>
               <a:t>GigaGains</a:t>
             </a:r>
@@ -6879,38 +6997,25 @@
                 <a:effectLst/>
                 <a:latin typeface="Arial" panose="020B0604020202020204" pitchFamily="34" charset="0"/>
                 <a:ea typeface="Arial" panose="020B0604020202020204" pitchFamily="34" charset="0"/>
-                <a:cs typeface="Noto Sans Symbols"/>
+                <a:cs typeface="Arial" panose="020B0604020202020204" pitchFamily="34" charset="0"/>
               </a:rPr>
               <a:t>.</a:t>
             </a:r>
+            <a:br>
+              <a:rPr lang="es-CO" sz="1600" dirty="0">
+                <a:solidFill>
+                  <a:srgbClr val="000000"/>
+                </a:solidFill>
+                <a:latin typeface="Arial" panose="020B0604020202020204" pitchFamily="34" charset="0"/>
+                <a:ea typeface="Arial" panose="020B0604020202020204" pitchFamily="34" charset="0"/>
+                <a:cs typeface="Arial" panose="020B0604020202020204" pitchFamily="34" charset="0"/>
+              </a:rPr>
+            </a:br>
             <a:endParaRPr lang="es-CO" sz="1600" dirty="0">
               <a:effectLst/>
-              <a:latin typeface="Noto Sans Symbols"/>
-              <a:ea typeface="Noto Sans Symbols"/>
-              <a:cs typeface="Noto Sans Symbols"/>
-            </a:endParaRPr>
-          </a:p>
-          <a:p>
-            <a:pPr>
-              <a:lnSpc>
-                <a:spcPct val="107000"/>
-              </a:lnSpc>
-              <a:spcAft>
-                <a:spcPts val="800"/>
-              </a:spcAft>
-            </a:pPr>
-            <a:r>
-              <a:rPr lang="es-CO" sz="1600" dirty="0">
-                <a:effectLst/>
-                <a:latin typeface="Arial" panose="020B0604020202020204" pitchFamily="34" charset="0"/>
-                <a:ea typeface="Arial" panose="020B0604020202020204" pitchFamily="34" charset="0"/>
-              </a:rPr>
-              <a:t> </a:t>
-            </a:r>
-            <a:endParaRPr lang="es-CO" sz="1600" dirty="0">
-              <a:effectLst/>
-              <a:latin typeface="Calibri" panose="020F0502020204030204" pitchFamily="34" charset="0"/>
+              <a:latin typeface="Arial" panose="020B0604020202020204" pitchFamily="34" charset="0"/>
               <a:ea typeface="Calibri" panose="020F0502020204030204" pitchFamily="34" charset="0"/>
+              <a:cs typeface="Arial" panose="020B0604020202020204" pitchFamily="34" charset="0"/>
             </a:endParaRPr>
           </a:p>
           <a:p>
@@ -6929,35 +7034,23 @@
                 <a:effectLst/>
                 <a:latin typeface="Arial" panose="020B0604020202020204" pitchFamily="34" charset="0"/>
                 <a:ea typeface="Arial" panose="020B0604020202020204" pitchFamily="34" charset="0"/>
-                <a:cs typeface="Noto Sans Symbols"/>
-              </a:rPr>
-              <a:t>Integrar una base de datos que permita cargar y administrar los datos de los usuarios y planes. </a:t>
-            </a:r>
-            <a:endParaRPr lang="es-CO" sz="1600" dirty="0">
-              <a:effectLst/>
-              <a:latin typeface="Noto Sans Symbols"/>
-              <a:ea typeface="Noto Sans Symbols"/>
-              <a:cs typeface="Noto Sans Symbols"/>
-            </a:endParaRPr>
-          </a:p>
-          <a:p>
-            <a:pPr marL="457200">
-              <a:lnSpc>
-                <a:spcPct val="107000"/>
-              </a:lnSpc>
-            </a:pPr>
-            <a:r>
+                <a:cs typeface="Arial" panose="020B0604020202020204" pitchFamily="34" charset="0"/>
+              </a:rPr>
+              <a:t>Integrar una base de datos que permita cargar y administrar los datos de los usuarios y planes.</a:t>
+            </a:r>
+            <a:br>
               <a:rPr lang="es-CO" sz="1600" dirty="0">
                 <a:effectLst/>
                 <a:latin typeface="Arial" panose="020B0604020202020204" pitchFamily="34" charset="0"/>
                 <a:ea typeface="Arial" panose="020B0604020202020204" pitchFamily="34" charset="0"/>
-              </a:rPr>
-              <a:t> </a:t>
-            </a:r>
+                <a:cs typeface="Arial" panose="020B0604020202020204" pitchFamily="34" charset="0"/>
+              </a:rPr>
+            </a:br>
             <a:endParaRPr lang="es-CO" sz="1600" dirty="0">
               <a:effectLst/>
-              <a:latin typeface="Calibri" panose="020F0502020204030204" pitchFamily="34" charset="0"/>
+              <a:latin typeface="Arial" panose="020B0604020202020204" pitchFamily="34" charset="0"/>
               <a:ea typeface="Calibri" panose="020F0502020204030204" pitchFamily="34" charset="0"/>
+              <a:cs typeface="Arial" panose="020B0604020202020204" pitchFamily="34" charset="0"/>
             </a:endParaRPr>
           </a:p>
           <a:p>
@@ -6976,36 +7069,23 @@
                 <a:effectLst/>
                 <a:latin typeface="Arial" panose="020B0604020202020204" pitchFamily="34" charset="0"/>
                 <a:ea typeface="Arial" panose="020B0604020202020204" pitchFamily="34" charset="0"/>
+                <a:cs typeface="Arial" panose="020B0604020202020204" pitchFamily="34" charset="0"/>
               </a:rPr>
               <a:t>Permitir la modificación y eliminación de usuarios.</a:t>
             </a:r>
-            <a:endParaRPr lang="es-CO" sz="1600" dirty="0">
-              <a:effectLst/>
-              <a:latin typeface="Calibri" panose="020F0502020204030204" pitchFamily="34" charset="0"/>
-              <a:ea typeface="Calibri" panose="020F0502020204030204" pitchFamily="34" charset="0"/>
-            </a:endParaRPr>
-          </a:p>
-          <a:p>
-            <a:pPr>
-              <a:lnSpc>
-                <a:spcPct val="107000"/>
-              </a:lnSpc>
-              <a:spcAft>
-                <a:spcPts val="800"/>
-              </a:spcAft>
-            </a:pPr>
-            <a:r>
+            <a:br>
               <a:rPr lang="es-MX" sz="1600" dirty="0">
                 <a:effectLst/>
                 <a:latin typeface="Arial" panose="020B0604020202020204" pitchFamily="34" charset="0"/>
                 <a:ea typeface="Arial" panose="020B0604020202020204" pitchFamily="34" charset="0"/>
-              </a:rPr>
-              <a:t> </a:t>
-            </a:r>
+                <a:cs typeface="Arial" panose="020B0604020202020204" pitchFamily="34" charset="0"/>
+              </a:rPr>
+            </a:br>
             <a:endParaRPr lang="es-CO" sz="1600" dirty="0">
               <a:effectLst/>
-              <a:latin typeface="Calibri" panose="020F0502020204030204" pitchFamily="34" charset="0"/>
+              <a:latin typeface="Arial" panose="020B0604020202020204" pitchFamily="34" charset="0"/>
               <a:ea typeface="Calibri" panose="020F0502020204030204" pitchFamily="34" charset="0"/>
+              <a:cs typeface="Arial" panose="020B0604020202020204" pitchFamily="34" charset="0"/>
             </a:endParaRPr>
           </a:p>
           <a:p>
@@ -7024,36 +7104,23 @@
                 <a:effectLst/>
                 <a:latin typeface="Arial" panose="020B0604020202020204" pitchFamily="34" charset="0"/>
                 <a:ea typeface="Arial" panose="020B0604020202020204" pitchFamily="34" charset="0"/>
+                <a:cs typeface="Arial" panose="020B0604020202020204" pitchFamily="34" charset="0"/>
               </a:rPr>
               <a:t>Facilitar la gestión de datos como ejercicios, circuitos, rutinas y dietas.</a:t>
             </a:r>
-            <a:endParaRPr lang="es-CO" sz="1600" dirty="0">
-              <a:effectLst/>
-              <a:latin typeface="Calibri" panose="020F0502020204030204" pitchFamily="34" charset="0"/>
-              <a:ea typeface="Calibri" panose="020F0502020204030204" pitchFamily="34" charset="0"/>
-            </a:endParaRPr>
-          </a:p>
-          <a:p>
-            <a:pPr>
-              <a:lnSpc>
-                <a:spcPct val="107000"/>
-              </a:lnSpc>
-              <a:spcAft>
-                <a:spcPts val="800"/>
-              </a:spcAft>
-            </a:pPr>
-            <a:r>
+            <a:br>
               <a:rPr lang="es-MX" sz="1600" dirty="0">
                 <a:effectLst/>
                 <a:latin typeface="Arial" panose="020B0604020202020204" pitchFamily="34" charset="0"/>
                 <a:ea typeface="Arial" panose="020B0604020202020204" pitchFamily="34" charset="0"/>
-              </a:rPr>
-              <a:t> </a:t>
-            </a:r>
-            <a:endParaRPr lang="es-CO" sz="1600" dirty="0">
+                <a:cs typeface="Arial" panose="020B0604020202020204" pitchFamily="34" charset="0"/>
+              </a:rPr>
+            </a:br>
+            <a:endParaRPr lang="es-MX" sz="1600" dirty="0">
               <a:effectLst/>
-              <a:latin typeface="Calibri" panose="020F0502020204030204" pitchFamily="34" charset="0"/>
-              <a:ea typeface="Calibri" panose="020F0502020204030204" pitchFamily="34" charset="0"/>
+              <a:latin typeface="Arial" panose="020B0604020202020204" pitchFamily="34" charset="0"/>
+              <a:ea typeface="Arial" panose="020B0604020202020204" pitchFamily="34" charset="0"/>
+              <a:cs typeface="Arial" panose="020B0604020202020204" pitchFamily="34" charset="0"/>
             </a:endParaRPr>
           </a:p>
           <a:p>
@@ -7069,117 +7136,23 @@
                 <a:effectLst/>
                 <a:latin typeface="Arial" panose="020B0604020202020204" pitchFamily="34" charset="0"/>
                 <a:ea typeface="Arial" panose="020B0604020202020204" pitchFamily="34" charset="0"/>
-              </a:rPr>
-              <a:t>Proteger el software con autenticación a los administradores con su correo y contraseña proporcionada por el Super Administrador.</a:t>
-            </a:r>
-            <a:endParaRPr lang="es-CO" sz="1600" dirty="0">
-              <a:effectLst/>
-              <a:latin typeface="Calibri" panose="020F0502020204030204" pitchFamily="34" charset="0"/>
-              <a:ea typeface="Calibri" panose="020F0502020204030204" pitchFamily="34" charset="0"/>
-            </a:endParaRPr>
-          </a:p>
-          <a:p>
-            <a:pPr marL="457200">
-              <a:lnSpc>
-                <a:spcPct val="107000"/>
-              </a:lnSpc>
-            </a:pPr>
-            <a:r>
+                <a:cs typeface="Arial" panose="020B0604020202020204" pitchFamily="34" charset="0"/>
+              </a:rPr>
+              <a:t>Permitir ver en una vista como está compuesto un plan, logrando ver la rutina, dieta, circuitos y ejercicios que componen el plan.</a:t>
+            </a:r>
+            <a:br>
               <a:rPr lang="es-MX" sz="1600" dirty="0">
                 <a:effectLst/>
                 <a:latin typeface="Arial" panose="020B0604020202020204" pitchFamily="34" charset="0"/>
                 <a:ea typeface="Arial" panose="020B0604020202020204" pitchFamily="34" charset="0"/>
-              </a:rPr>
-              <a:t> </a:t>
-            </a:r>
+                <a:cs typeface="Arial" panose="020B0604020202020204" pitchFamily="34" charset="0"/>
+              </a:rPr>
+            </a:br>
             <a:endParaRPr lang="es-CO" sz="1600" dirty="0">
               <a:effectLst/>
-              <a:latin typeface="Calibri" panose="020F0502020204030204" pitchFamily="34" charset="0"/>
+              <a:latin typeface="Arial" panose="020B0604020202020204" pitchFamily="34" charset="0"/>
               <a:ea typeface="Calibri" panose="020F0502020204030204" pitchFamily="34" charset="0"/>
-            </a:endParaRPr>
-          </a:p>
-          <a:p>
-            <a:pPr marL="342900" lvl="0" indent="-342900">
-              <a:lnSpc>
-                <a:spcPct val="107000"/>
-              </a:lnSpc>
-              <a:buFont typeface="Symbol" panose="05050102010706020507" pitchFamily="18" charset="2"/>
-              <a:buChar char=""/>
-            </a:pPr>
-            <a:r>
-              <a:rPr lang="es-MX" sz="1600" dirty="0">
-                <a:effectLst/>
-                <a:latin typeface="Arial" panose="020B0604020202020204" pitchFamily="34" charset="0"/>
-                <a:ea typeface="Arial" panose="020B0604020202020204" pitchFamily="34" charset="0"/>
-              </a:rPr>
-              <a:t>Diseñar una interfaz amigable y eficiente para los administradores que facilite el manejo de planes y usuarios.</a:t>
-            </a:r>
-            <a:endParaRPr lang="es-CO" sz="1600" dirty="0">
-              <a:effectLst/>
-              <a:latin typeface="Calibri" panose="020F0502020204030204" pitchFamily="34" charset="0"/>
-              <a:ea typeface="Calibri" panose="020F0502020204030204" pitchFamily="34" charset="0"/>
-            </a:endParaRPr>
-          </a:p>
-          <a:p>
-            <a:pPr marL="457200">
-              <a:lnSpc>
-                <a:spcPct val="107000"/>
-              </a:lnSpc>
-            </a:pPr>
-            <a:r>
-              <a:rPr lang="es-MX" sz="1600" dirty="0">
-                <a:effectLst/>
-                <a:latin typeface="Arial" panose="020B0604020202020204" pitchFamily="34" charset="0"/>
-                <a:ea typeface="Arial" panose="020B0604020202020204" pitchFamily="34" charset="0"/>
-              </a:rPr>
-              <a:t> </a:t>
-            </a:r>
-            <a:endParaRPr lang="es-CO" sz="1600" dirty="0">
-              <a:effectLst/>
-              <a:latin typeface="Calibri" panose="020F0502020204030204" pitchFamily="34" charset="0"/>
-              <a:ea typeface="Calibri" panose="020F0502020204030204" pitchFamily="34" charset="0"/>
-            </a:endParaRPr>
-          </a:p>
-          <a:p>
-            <a:pPr marL="342900" lvl="0" indent="-342900">
-              <a:lnSpc>
-                <a:spcPct val="107000"/>
-              </a:lnSpc>
-              <a:buFont typeface="Symbol" panose="05050102010706020507" pitchFamily="18" charset="2"/>
-              <a:buChar char=""/>
-            </a:pPr>
-            <a:r>
-              <a:rPr lang="es-MX" sz="1600" dirty="0">
-                <a:effectLst/>
-                <a:latin typeface="Arial" panose="020B0604020202020204" pitchFamily="34" charset="0"/>
-                <a:ea typeface="Arial" panose="020B0604020202020204" pitchFamily="34" charset="0"/>
-              </a:rPr>
-              <a:t>Permitir al Super Administrador la asignación de roles y permisos a los administradores.</a:t>
-            </a:r>
-            <a:endParaRPr lang="es-CO" sz="1600" dirty="0">
-              <a:effectLst/>
-              <a:latin typeface="Calibri" panose="020F0502020204030204" pitchFamily="34" charset="0"/>
-              <a:ea typeface="Calibri" panose="020F0502020204030204" pitchFamily="34" charset="0"/>
-            </a:endParaRPr>
-          </a:p>
-          <a:p>
-            <a:pPr marL="457200">
-              <a:lnSpc>
-                <a:spcPct val="107000"/>
-              </a:lnSpc>
-            </a:pPr>
-            <a:r>
-              <a:rPr lang="es-MX" sz="1600" dirty="0">
-                <a:effectLst/>
-                <a:latin typeface="Arial" panose="020B0604020202020204" pitchFamily="34" charset="0"/>
-                <a:ea typeface="Arial" panose="020B0604020202020204" pitchFamily="34" charset="0"/>
-              </a:rPr>
-              <a:t> </a:t>
-            </a:r>
-            <a:endParaRPr lang="es-CO" sz="1600" dirty="0">
-              <a:effectLst/>
-              <a:latin typeface="Calibri" panose="020F0502020204030204" pitchFamily="34" charset="0"/>
-              <a:ea typeface="Calibri" panose="020F0502020204030204" pitchFamily="34" charset="0"/>
+              <a:cs typeface="Arial" panose="020B0604020202020204" pitchFamily="34" charset="0"/>
             </a:endParaRPr>
           </a:p>
           <a:p>
@@ -7198,13 +7171,146 @@
                 <a:effectLst/>
                 <a:latin typeface="Arial" panose="020B0604020202020204" pitchFamily="34" charset="0"/>
                 <a:ea typeface="Arial" panose="020B0604020202020204" pitchFamily="34" charset="0"/>
-              </a:rPr>
-              <a:t>Permitir al Super Administrador el poder restablecer Ejercicios, Circuitos, Rutinas, Dietas, Planes y Usuarios.</a:t>
-            </a:r>
+                <a:cs typeface="Arial" panose="020B0604020202020204" pitchFamily="34" charset="0"/>
+              </a:rPr>
+              <a:t>Visualizar el progreso de los usuarios atreves de pesos que se registran en la página web por ellos mismos. </a:t>
+            </a:r>
+            <a:br>
+              <a:rPr lang="es-MX" sz="1600" dirty="0">
+                <a:effectLst/>
+                <a:latin typeface="Arial" panose="020B0604020202020204" pitchFamily="34" charset="0"/>
+                <a:ea typeface="Arial" panose="020B0604020202020204" pitchFamily="34" charset="0"/>
+                <a:cs typeface="Arial" panose="020B0604020202020204" pitchFamily="34" charset="0"/>
+              </a:rPr>
+            </a:br>
             <a:endParaRPr lang="es-CO" sz="1600" dirty="0">
               <a:effectLst/>
-              <a:latin typeface="Calibri" panose="020F0502020204030204" pitchFamily="34" charset="0"/>
+              <a:latin typeface="Arial" panose="020B0604020202020204" pitchFamily="34" charset="0"/>
               <a:ea typeface="Calibri" panose="020F0502020204030204" pitchFamily="34" charset="0"/>
+              <a:cs typeface="Arial" panose="020B0604020202020204" pitchFamily="34" charset="0"/>
+            </a:endParaRPr>
+          </a:p>
+          <a:p>
+            <a:pPr marL="342900" lvl="0" indent="-342900">
+              <a:lnSpc>
+                <a:spcPct val="107000"/>
+              </a:lnSpc>
+              <a:buFont typeface="Symbol" panose="05050102010706020507" pitchFamily="18" charset="2"/>
+              <a:buChar char=""/>
+            </a:pPr>
+            <a:r>
+              <a:rPr lang="es-MX" sz="1600" dirty="0">
+                <a:effectLst/>
+                <a:latin typeface="Arial" panose="020B0604020202020204" pitchFamily="34" charset="0"/>
+                <a:ea typeface="Arial" panose="020B0604020202020204" pitchFamily="34" charset="0"/>
+                <a:cs typeface="Arial" panose="020B0604020202020204" pitchFamily="34" charset="0"/>
+              </a:rPr>
+              <a:t>Proteger el software con autenticación a los administradores con su correo y contraseña proporcionada por el Super Administrador. </a:t>
+            </a:r>
+            <a:br>
+              <a:rPr lang="es-MX" sz="1600" dirty="0">
+                <a:effectLst/>
+                <a:latin typeface="Arial" panose="020B0604020202020204" pitchFamily="34" charset="0"/>
+                <a:ea typeface="Arial" panose="020B0604020202020204" pitchFamily="34" charset="0"/>
+                <a:cs typeface="Arial" panose="020B0604020202020204" pitchFamily="34" charset="0"/>
+              </a:rPr>
+            </a:br>
+            <a:endParaRPr lang="es-CO" sz="1600" dirty="0">
+              <a:effectLst/>
+              <a:latin typeface="Arial" panose="020B0604020202020204" pitchFamily="34" charset="0"/>
+              <a:ea typeface="Calibri" panose="020F0502020204030204" pitchFamily="34" charset="0"/>
+              <a:cs typeface="Arial" panose="020B0604020202020204" pitchFamily="34" charset="0"/>
+            </a:endParaRPr>
+          </a:p>
+          <a:p>
+            <a:pPr marL="342900" lvl="0" indent="-342900">
+              <a:lnSpc>
+                <a:spcPct val="107000"/>
+              </a:lnSpc>
+              <a:buFont typeface="Symbol" panose="05050102010706020507" pitchFamily="18" charset="2"/>
+              <a:buChar char=""/>
+            </a:pPr>
+            <a:r>
+              <a:rPr lang="es-MX" sz="1600" dirty="0">
+                <a:effectLst/>
+                <a:latin typeface="Arial" panose="020B0604020202020204" pitchFamily="34" charset="0"/>
+                <a:ea typeface="Arial" panose="020B0604020202020204" pitchFamily="34" charset="0"/>
+                <a:cs typeface="Arial" panose="020B0604020202020204" pitchFamily="34" charset="0"/>
+              </a:rPr>
+              <a:t>Diseñar una interfaz amigable y eficiente para los administradores que facilite el manejo de planes y usuarios. </a:t>
+            </a:r>
+            <a:br>
+              <a:rPr lang="es-MX" sz="1600" dirty="0">
+                <a:effectLst/>
+                <a:latin typeface="Arial" panose="020B0604020202020204" pitchFamily="34" charset="0"/>
+                <a:ea typeface="Arial" panose="020B0604020202020204" pitchFamily="34" charset="0"/>
+                <a:cs typeface="Arial" panose="020B0604020202020204" pitchFamily="34" charset="0"/>
+              </a:rPr>
+            </a:br>
+            <a:endParaRPr lang="es-CO" sz="1600" dirty="0">
+              <a:effectLst/>
+              <a:latin typeface="Arial" panose="020B0604020202020204" pitchFamily="34" charset="0"/>
+              <a:ea typeface="Calibri" panose="020F0502020204030204" pitchFamily="34" charset="0"/>
+              <a:cs typeface="Arial" panose="020B0604020202020204" pitchFamily="34" charset="0"/>
+            </a:endParaRPr>
+          </a:p>
+          <a:p>
+            <a:pPr marL="342900" lvl="0" indent="-342900">
+              <a:lnSpc>
+                <a:spcPct val="107000"/>
+              </a:lnSpc>
+              <a:buFont typeface="Symbol" panose="05050102010706020507" pitchFamily="18" charset="2"/>
+              <a:buChar char=""/>
+            </a:pPr>
+            <a:r>
+              <a:rPr lang="es-MX" sz="1600" dirty="0">
+                <a:effectLst/>
+                <a:latin typeface="Arial" panose="020B0604020202020204" pitchFamily="34" charset="0"/>
+                <a:ea typeface="Arial" panose="020B0604020202020204" pitchFamily="34" charset="0"/>
+                <a:cs typeface="Arial" panose="020B0604020202020204" pitchFamily="34" charset="0"/>
+              </a:rPr>
+              <a:t>Permitir al Super Administrador la asignación de roles y permisos a los administradores. </a:t>
+            </a:r>
+            <a:br>
+              <a:rPr lang="es-MX" sz="1600" dirty="0">
+                <a:effectLst/>
+                <a:latin typeface="Arial" panose="020B0604020202020204" pitchFamily="34" charset="0"/>
+                <a:ea typeface="Arial" panose="020B0604020202020204" pitchFamily="34" charset="0"/>
+                <a:cs typeface="Arial" panose="020B0604020202020204" pitchFamily="34" charset="0"/>
+              </a:rPr>
+            </a:br>
+            <a:endParaRPr lang="es-CO" sz="1600" dirty="0">
+              <a:effectLst/>
+              <a:latin typeface="Arial" panose="020B0604020202020204" pitchFamily="34" charset="0"/>
+              <a:ea typeface="Calibri" panose="020F0502020204030204" pitchFamily="34" charset="0"/>
+              <a:cs typeface="Arial" panose="020B0604020202020204" pitchFamily="34" charset="0"/>
+            </a:endParaRPr>
+          </a:p>
+          <a:p>
+            <a:pPr marL="342900" lvl="0" indent="-342900">
+              <a:lnSpc>
+                <a:spcPct val="107000"/>
+              </a:lnSpc>
+              <a:spcAft>
+                <a:spcPts val="800"/>
+              </a:spcAft>
+              <a:buFont typeface="Symbol" panose="05050102010706020507" pitchFamily="18" charset="2"/>
+              <a:buChar char=""/>
+            </a:pPr>
+            <a:r>
+              <a:rPr lang="es-MX" sz="1600" dirty="0">
+                <a:effectLst/>
+                <a:latin typeface="Arial" panose="020B0604020202020204" pitchFamily="34" charset="0"/>
+                <a:ea typeface="Arial" panose="020B0604020202020204" pitchFamily="34" charset="0"/>
+                <a:cs typeface="Arial" panose="020B0604020202020204" pitchFamily="34" charset="0"/>
+              </a:rPr>
+              <a:t>Permitir al Super Administrador el poder restablecer Ejercicios, Circuitos, Rutinas, Dietas, Planes y Usuarios.</a:t>
+            </a:r>
+            <a:endParaRPr lang="es-CO" sz="1600" dirty="0">
+              <a:effectLst/>
+              <a:latin typeface="Arial" panose="020B0604020202020204" pitchFamily="34" charset="0"/>
+              <a:ea typeface="Calibri" panose="020F0502020204030204" pitchFamily="34" charset="0"/>
+              <a:cs typeface="Arial" panose="020B0604020202020204" pitchFamily="34" charset="0"/>
             </a:endParaRPr>
           </a:p>
         </p:txBody>
